--- a/ポートフォリオ.pptx
+++ b/ポートフォリオ.pptx
@@ -234,7 +234,7 @@
           <a:p>
             <a:fld id="{DE2EB211-95CE-4465-AE82-71FC1BD57B75}" type="datetimeFigureOut">
               <a:rPr kumimoji="1" lang="ja-JP" altLang="en-US" smtClean="0"/>
-              <a:t>2025/5/16</a:t>
+              <a:t>2025/9/16</a:t>
             </a:fld>
             <a:endParaRPr kumimoji="1" lang="ja-JP" altLang="en-US"/>
           </a:p>
@@ -411,7 +411,7 @@
           <a:p>
             <a:fld id="{4955FFDA-CD2B-48C3-9523-160A6827052C}" type="datetimeFigureOut">
               <a:rPr kumimoji="1" lang="ja-JP" altLang="en-US" smtClean="0"/>
-              <a:t>2025/5/16</a:t>
+              <a:t>2025/9/16</a:t>
             </a:fld>
             <a:endParaRPr kumimoji="1" lang="ja-JP" altLang="en-US"/>
           </a:p>
@@ -1062,7 +1062,7 @@
           <a:p>
             <a:fld id="{1A82EE06-D961-426C-A9FF-E6B541017B60}" type="datetimeFigureOut">
               <a:rPr kumimoji="1" lang="ja-JP" altLang="en-US" smtClean="0"/>
-              <a:t>2025/5/16</a:t>
+              <a:t>2025/9/16</a:t>
             </a:fld>
             <a:endParaRPr kumimoji="1" lang="ja-JP" altLang="en-US"/>
           </a:p>
@@ -1262,7 +1262,7 @@
           <a:p>
             <a:fld id="{1A82EE06-D961-426C-A9FF-E6B541017B60}" type="datetimeFigureOut">
               <a:rPr kumimoji="1" lang="ja-JP" altLang="en-US" smtClean="0"/>
-              <a:t>2025/5/16</a:t>
+              <a:t>2025/9/16</a:t>
             </a:fld>
             <a:endParaRPr kumimoji="1" lang="ja-JP" altLang="en-US"/>
           </a:p>
@@ -1472,7 +1472,7 @@
           <a:p>
             <a:fld id="{1A82EE06-D961-426C-A9FF-E6B541017B60}" type="datetimeFigureOut">
               <a:rPr kumimoji="1" lang="ja-JP" altLang="en-US" smtClean="0"/>
-              <a:t>2025/5/16</a:t>
+              <a:t>2025/9/16</a:t>
             </a:fld>
             <a:endParaRPr kumimoji="1" lang="ja-JP" altLang="en-US"/>
           </a:p>
@@ -1672,7 +1672,7 @@
           <a:p>
             <a:fld id="{1A82EE06-D961-426C-A9FF-E6B541017B60}" type="datetimeFigureOut">
               <a:rPr kumimoji="1" lang="ja-JP" altLang="en-US" smtClean="0"/>
-              <a:t>2025/5/16</a:t>
+              <a:t>2025/9/16</a:t>
             </a:fld>
             <a:endParaRPr kumimoji="1" lang="ja-JP" altLang="en-US"/>
           </a:p>
@@ -1917,7 +1917,7 @@
           <a:p>
             <a:fld id="{1A82EE06-D961-426C-A9FF-E6B541017B60}" type="datetimeFigureOut">
               <a:rPr kumimoji="1" lang="ja-JP" altLang="en-US" smtClean="0"/>
-              <a:t>2025/5/16</a:t>
+              <a:t>2025/9/16</a:t>
             </a:fld>
             <a:endParaRPr kumimoji="1" lang="ja-JP" altLang="en-US"/>
           </a:p>
@@ -2266,7 +2266,7 @@
           <a:p>
             <a:fld id="{1A82EE06-D961-426C-A9FF-E6B541017B60}" type="datetimeFigureOut">
               <a:rPr kumimoji="1" lang="ja-JP" altLang="en-US" smtClean="0"/>
-              <a:t>2025/5/16</a:t>
+              <a:t>2025/9/16</a:t>
             </a:fld>
             <a:endParaRPr kumimoji="1" lang="ja-JP" altLang="en-US"/>
           </a:p>
@@ -2749,7 +2749,7 @@
           <a:p>
             <a:fld id="{1A82EE06-D961-426C-A9FF-E6B541017B60}" type="datetimeFigureOut">
               <a:rPr kumimoji="1" lang="ja-JP" altLang="en-US" smtClean="0"/>
-              <a:t>2025/5/16</a:t>
+              <a:t>2025/9/16</a:t>
             </a:fld>
             <a:endParaRPr kumimoji="1" lang="ja-JP" altLang="en-US"/>
           </a:p>
@@ -2866,7 +2866,7 @@
           <a:p>
             <a:fld id="{1A82EE06-D961-426C-A9FF-E6B541017B60}" type="datetimeFigureOut">
               <a:rPr kumimoji="1" lang="ja-JP" altLang="en-US" smtClean="0"/>
-              <a:t>2025/5/16</a:t>
+              <a:t>2025/9/16</a:t>
             </a:fld>
             <a:endParaRPr kumimoji="1" lang="ja-JP" altLang="en-US"/>
           </a:p>
@@ -2961,7 +2961,7 @@
           <a:p>
             <a:fld id="{1A82EE06-D961-426C-A9FF-E6B541017B60}" type="datetimeFigureOut">
               <a:rPr kumimoji="1" lang="ja-JP" altLang="en-US" smtClean="0"/>
-              <a:t>2025/5/16</a:t>
+              <a:t>2025/9/16</a:t>
             </a:fld>
             <a:endParaRPr kumimoji="1" lang="ja-JP" altLang="en-US"/>
           </a:p>
@@ -3268,7 +3268,7 @@
           <a:p>
             <a:fld id="{1A82EE06-D961-426C-A9FF-E6B541017B60}" type="datetimeFigureOut">
               <a:rPr kumimoji="1" lang="ja-JP" altLang="en-US" smtClean="0"/>
-              <a:t>2025/5/16</a:t>
+              <a:t>2025/9/16</a:t>
             </a:fld>
             <a:endParaRPr kumimoji="1" lang="ja-JP" altLang="en-US"/>
           </a:p>
@@ -3520,7 +3520,7 @@
           <a:p>
             <a:fld id="{1A82EE06-D961-426C-A9FF-E6B541017B60}" type="datetimeFigureOut">
               <a:rPr kumimoji="1" lang="ja-JP" altLang="en-US" smtClean="0"/>
-              <a:t>2025/5/16</a:t>
+              <a:t>2025/9/16</a:t>
             </a:fld>
             <a:endParaRPr kumimoji="1" lang="ja-JP" altLang="en-US"/>
           </a:p>
@@ -3772,7 +3772,7 @@
           <a:p>
             <a:fld id="{1A82EE06-D961-426C-A9FF-E6B541017B60}" type="datetimeFigureOut">
               <a:rPr kumimoji="1" lang="ja-JP" altLang="en-US" smtClean="0"/>
-              <a:t>2025/5/16</a:t>
+              <a:t>2025/9/16</a:t>
             </a:fld>
             <a:endParaRPr kumimoji="1" lang="ja-JP" altLang="en-US"/>
           </a:p>
@@ -4363,10 +4363,10 @@
       </p:sp>
       <p:pic>
         <p:nvPicPr>
-          <p:cNvPr id="6" name="図 5">
+          <p:cNvPr id="7" name="図 6">
             <a:extLst>
               <a:ext uri="{FF2B5EF4-FFF2-40B4-BE49-F238E27FC236}">
-                <a16:creationId xmlns:a16="http://schemas.microsoft.com/office/drawing/2014/main" id="{99C8C43D-0ABA-4252-A41B-CF009E546591}"/>
+                <a16:creationId xmlns:a16="http://schemas.microsoft.com/office/drawing/2014/main" id="{FB23B0AE-75F3-4C21-8D34-2A51C75671DA}"/>
               </a:ext>
             </a:extLst>
           </p:cNvPr>
@@ -4389,8 +4389,8 @@
         </p:blipFill>
         <p:spPr>
           <a:xfrm rot="10800000">
-            <a:off x="4232920" y="2852936"/>
-            <a:ext cx="4572000" cy="3429000"/>
+            <a:off x="4953000" y="3284984"/>
+            <a:ext cx="3809873" cy="2857405"/>
           </a:xfrm>
           <a:prstGeom prst="rect">
             <a:avLst/>

--- a/ポートフォリオ.pptx
+++ b/ポートフォリオ.pptx
@@ -5,21 +5,24 @@
     <p:sldMasterId id="2147483648" r:id="rId1"/>
   </p:sldMasterIdLst>
   <p:notesMasterIdLst>
-    <p:notesMasterId r:id="rId11"/>
+    <p:notesMasterId r:id="rId14"/>
   </p:notesMasterIdLst>
   <p:handoutMasterIdLst>
-    <p:handoutMasterId r:id="rId12"/>
+    <p:handoutMasterId r:id="rId15"/>
   </p:handoutMasterIdLst>
   <p:sldIdLst>
     <p:sldId id="259" r:id="rId2"/>
     <p:sldId id="265" r:id="rId3"/>
-    <p:sldId id="266" r:id="rId4"/>
-    <p:sldId id="257" r:id="rId5"/>
-    <p:sldId id="263" r:id="rId6"/>
-    <p:sldId id="258" r:id="rId7"/>
-    <p:sldId id="260" r:id="rId8"/>
-    <p:sldId id="261" r:id="rId9"/>
-    <p:sldId id="264" r:id="rId10"/>
+    <p:sldId id="267" r:id="rId4"/>
+    <p:sldId id="268" r:id="rId5"/>
+    <p:sldId id="269" r:id="rId6"/>
+    <p:sldId id="266" r:id="rId7"/>
+    <p:sldId id="257" r:id="rId8"/>
+    <p:sldId id="263" r:id="rId9"/>
+    <p:sldId id="258" r:id="rId10"/>
+    <p:sldId id="260" r:id="rId11"/>
+    <p:sldId id="261" r:id="rId12"/>
+    <p:sldId id="264" r:id="rId13"/>
   </p:sldIdLst>
   <p:sldSz cx="9906000" cy="6858000" type="A4"/>
   <p:notesSz cx="6858000" cy="9144000"/>
@@ -234,7 +237,7 @@
           <a:p>
             <a:fld id="{DE2EB211-95CE-4465-AE82-71FC1BD57B75}" type="datetimeFigureOut">
               <a:rPr kumimoji="1" lang="ja-JP" altLang="en-US" smtClean="0"/>
-              <a:t>2025/9/16</a:t>
+              <a:t>2025/9/25</a:t>
             </a:fld>
             <a:endParaRPr kumimoji="1" lang="ja-JP" altLang="en-US"/>
           </a:p>
@@ -411,7 +414,7 @@
           <a:p>
             <a:fld id="{4955FFDA-CD2B-48C3-9523-160A6827052C}" type="datetimeFigureOut">
               <a:rPr kumimoji="1" lang="ja-JP" altLang="en-US" smtClean="0"/>
-              <a:t>2025/9/16</a:t>
+              <a:t>2025/9/25</a:t>
             </a:fld>
             <a:endParaRPr kumimoji="1" lang="ja-JP" altLang="en-US"/>
           </a:p>
@@ -780,7 +783,7 @@
           <a:p>
             <a:fld id="{4E0F9C1C-2F35-4495-ABDD-C1C7C22641EE}" type="slidenum">
               <a:rPr kumimoji="1" lang="ja-JP" altLang="en-US" smtClean="0"/>
-              <a:t>4</a:t>
+              <a:t>7</a:t>
             </a:fld>
             <a:endParaRPr kumimoji="1" lang="ja-JP" altLang="en-US"/>
           </a:p>
@@ -864,7 +867,7 @@
           <a:p>
             <a:fld id="{4E0F9C1C-2F35-4495-ABDD-C1C7C22641EE}" type="slidenum">
               <a:rPr kumimoji="1" lang="ja-JP" altLang="en-US" smtClean="0"/>
-              <a:t>5</a:t>
+              <a:t>8</a:t>
             </a:fld>
             <a:endParaRPr kumimoji="1" lang="ja-JP" altLang="en-US"/>
           </a:p>
@@ -1062,7 +1065,7 @@
           <a:p>
             <a:fld id="{1A82EE06-D961-426C-A9FF-E6B541017B60}" type="datetimeFigureOut">
               <a:rPr kumimoji="1" lang="ja-JP" altLang="en-US" smtClean="0"/>
-              <a:t>2025/9/16</a:t>
+              <a:t>2025/9/25</a:t>
             </a:fld>
             <a:endParaRPr kumimoji="1" lang="ja-JP" altLang="en-US"/>
           </a:p>
@@ -1262,7 +1265,7 @@
           <a:p>
             <a:fld id="{1A82EE06-D961-426C-A9FF-E6B541017B60}" type="datetimeFigureOut">
               <a:rPr kumimoji="1" lang="ja-JP" altLang="en-US" smtClean="0"/>
-              <a:t>2025/9/16</a:t>
+              <a:t>2025/9/25</a:t>
             </a:fld>
             <a:endParaRPr kumimoji="1" lang="ja-JP" altLang="en-US"/>
           </a:p>
@@ -1472,7 +1475,7 @@
           <a:p>
             <a:fld id="{1A82EE06-D961-426C-A9FF-E6B541017B60}" type="datetimeFigureOut">
               <a:rPr kumimoji="1" lang="ja-JP" altLang="en-US" smtClean="0"/>
-              <a:t>2025/9/16</a:t>
+              <a:t>2025/9/25</a:t>
             </a:fld>
             <a:endParaRPr kumimoji="1" lang="ja-JP" altLang="en-US"/>
           </a:p>
@@ -1672,7 +1675,7 @@
           <a:p>
             <a:fld id="{1A82EE06-D961-426C-A9FF-E6B541017B60}" type="datetimeFigureOut">
               <a:rPr kumimoji="1" lang="ja-JP" altLang="en-US" smtClean="0"/>
-              <a:t>2025/9/16</a:t>
+              <a:t>2025/9/25</a:t>
             </a:fld>
             <a:endParaRPr kumimoji="1" lang="ja-JP" altLang="en-US"/>
           </a:p>
@@ -1917,7 +1920,7 @@
           <a:p>
             <a:fld id="{1A82EE06-D961-426C-A9FF-E6B541017B60}" type="datetimeFigureOut">
               <a:rPr kumimoji="1" lang="ja-JP" altLang="en-US" smtClean="0"/>
-              <a:t>2025/9/16</a:t>
+              <a:t>2025/9/25</a:t>
             </a:fld>
             <a:endParaRPr kumimoji="1" lang="ja-JP" altLang="en-US"/>
           </a:p>
@@ -2266,7 +2269,7 @@
           <a:p>
             <a:fld id="{1A82EE06-D961-426C-A9FF-E6B541017B60}" type="datetimeFigureOut">
               <a:rPr kumimoji="1" lang="ja-JP" altLang="en-US" smtClean="0"/>
-              <a:t>2025/9/16</a:t>
+              <a:t>2025/9/25</a:t>
             </a:fld>
             <a:endParaRPr kumimoji="1" lang="ja-JP" altLang="en-US"/>
           </a:p>
@@ -2749,7 +2752,7 @@
           <a:p>
             <a:fld id="{1A82EE06-D961-426C-A9FF-E6B541017B60}" type="datetimeFigureOut">
               <a:rPr kumimoji="1" lang="ja-JP" altLang="en-US" smtClean="0"/>
-              <a:t>2025/9/16</a:t>
+              <a:t>2025/9/25</a:t>
             </a:fld>
             <a:endParaRPr kumimoji="1" lang="ja-JP" altLang="en-US"/>
           </a:p>
@@ -2866,7 +2869,7 @@
           <a:p>
             <a:fld id="{1A82EE06-D961-426C-A9FF-E6B541017B60}" type="datetimeFigureOut">
               <a:rPr kumimoji="1" lang="ja-JP" altLang="en-US" smtClean="0"/>
-              <a:t>2025/9/16</a:t>
+              <a:t>2025/9/25</a:t>
             </a:fld>
             <a:endParaRPr kumimoji="1" lang="ja-JP" altLang="en-US"/>
           </a:p>
@@ -2961,7 +2964,7 @@
           <a:p>
             <a:fld id="{1A82EE06-D961-426C-A9FF-E6B541017B60}" type="datetimeFigureOut">
               <a:rPr kumimoji="1" lang="ja-JP" altLang="en-US" smtClean="0"/>
-              <a:t>2025/9/16</a:t>
+              <a:t>2025/9/25</a:t>
             </a:fld>
             <a:endParaRPr kumimoji="1" lang="ja-JP" altLang="en-US"/>
           </a:p>
@@ -3268,7 +3271,7 @@
           <a:p>
             <a:fld id="{1A82EE06-D961-426C-A9FF-E6B541017B60}" type="datetimeFigureOut">
               <a:rPr kumimoji="1" lang="ja-JP" altLang="en-US" smtClean="0"/>
-              <a:t>2025/9/16</a:t>
+              <a:t>2025/9/25</a:t>
             </a:fld>
             <a:endParaRPr kumimoji="1" lang="ja-JP" altLang="en-US"/>
           </a:p>
@@ -3520,7 +3523,7 @@
           <a:p>
             <a:fld id="{1A82EE06-D961-426C-A9FF-E6B541017B60}" type="datetimeFigureOut">
               <a:rPr kumimoji="1" lang="ja-JP" altLang="en-US" smtClean="0"/>
-              <a:t>2025/9/16</a:t>
+              <a:t>2025/9/25</a:t>
             </a:fld>
             <a:endParaRPr kumimoji="1" lang="ja-JP" altLang="en-US"/>
           </a:p>
@@ -3772,7 +3775,7 @@
           <a:p>
             <a:fld id="{1A82EE06-D961-426C-A9FF-E6B541017B60}" type="datetimeFigureOut">
               <a:rPr kumimoji="1" lang="ja-JP" altLang="en-US" smtClean="0"/>
-              <a:t>2025/9/16</a:t>
+              <a:t>2025/9/25</a:t>
             </a:fld>
             <a:endParaRPr kumimoji="1" lang="ja-JP" altLang="en-US"/>
           </a:p>
@@ -4410,6 +4413,446 @@
 </p:sld>
 </file>
 
+<file path=ppt/slides/slide10.xml><?xml version="1.0" encoding="utf-8"?>
+<p:sld xmlns:a="http://schemas.openxmlformats.org/drawingml/2006/main" xmlns:r="http://schemas.openxmlformats.org/officeDocument/2006/relationships" xmlns:p="http://schemas.openxmlformats.org/presentationml/2006/main">
+  <p:cSld>
+    <p:spTree>
+      <p:nvGrpSpPr>
+        <p:cNvPr id="1" name=""/>
+        <p:cNvGrpSpPr/>
+        <p:nvPr/>
+      </p:nvGrpSpPr>
+      <p:grpSpPr>
+        <a:xfrm>
+          <a:off x="0" y="0"/>
+          <a:ext cx="0" cy="0"/>
+          <a:chOff x="0" y="0"/>
+          <a:chExt cx="0" cy="0"/>
+        </a:xfrm>
+      </p:grpSpPr>
+      <p:sp>
+        <p:nvSpPr>
+          <p:cNvPr id="2" name="タイトル 1">
+            <a:extLst>
+              <a:ext uri="{FF2B5EF4-FFF2-40B4-BE49-F238E27FC236}">
+                <a16:creationId xmlns:a16="http://schemas.microsoft.com/office/drawing/2014/main" id="{DEB6D72E-669F-41E1-84C2-19FB59C30903}"/>
+              </a:ext>
+            </a:extLst>
+          </p:cNvPr>
+          <p:cNvSpPr>
+            <a:spLocks noGrp="1"/>
+          </p:cNvSpPr>
+          <p:nvPr>
+            <p:ph type="title"/>
+          </p:nvPr>
+        </p:nvSpPr>
+        <p:spPr>
+          <a:xfrm>
+            <a:off x="495299" y="980728"/>
+            <a:ext cx="8915400" cy="1143000"/>
+          </a:xfrm>
+        </p:spPr>
+        <p:txBody>
+          <a:bodyPr>
+            <a:normAutofit/>
+          </a:bodyPr>
+          <a:lstStyle/>
+          <a:p>
+            <a:r>
+              <a:rPr kumimoji="1" lang="ja-JP" altLang="en-US" sz="2000" dirty="0"/>
+              <a:t>敵の移動</a:t>
+            </a:r>
+            <a:r>
+              <a:rPr lang="ja-JP" altLang="en-US" sz="2000" dirty="0"/>
+              <a:t>は</a:t>
+            </a:r>
+            <a:r>
+              <a:rPr lang="en-US" altLang="ja-JP" sz="2000" dirty="0" err="1"/>
+              <a:t>Navmesh</a:t>
+            </a:r>
+            <a:r>
+              <a:rPr lang="ja-JP" altLang="en-US" sz="2000" dirty="0"/>
+              <a:t>を使い最短距離を出し、エリア内を歩き周り、プレイヤーまでの距離で足音などが変化するようにしている。ついでに敵を状態遷移ごとににスピードや動きなどを変えたりしている。</a:t>
+            </a:r>
+            <a:endParaRPr kumimoji="1" lang="ja-JP" altLang="en-US" sz="2000" dirty="0"/>
+          </a:p>
+        </p:txBody>
+      </p:sp>
+      <p:pic>
+        <p:nvPicPr>
+          <p:cNvPr id="9" name="コンテンツ プレースホルダー 8">
+            <a:extLst>
+              <a:ext uri="{FF2B5EF4-FFF2-40B4-BE49-F238E27FC236}">
+                <a16:creationId xmlns:a16="http://schemas.microsoft.com/office/drawing/2014/main" id="{B9D7BB10-B6EC-4EA5-A2F5-9A0E6DF944D5}"/>
+              </a:ext>
+            </a:extLst>
+          </p:cNvPr>
+          <p:cNvPicPr>
+            <a:picLocks noGrp="1" noChangeAspect="1"/>
+          </p:cNvPicPr>
+          <p:nvPr>
+            <p:ph idx="1"/>
+          </p:nvPr>
+        </p:nvPicPr>
+        <p:blipFill>
+          <a:blip r:embed="rId2">
+            <a:extLst>
+              <a:ext uri="{28A0092B-C50C-407E-A947-70E740481C1C}">
+                <a14:useLocalDpi xmlns:a14="http://schemas.microsoft.com/office/drawing/2010/main" val="0"/>
+              </a:ext>
+            </a:extLst>
+          </a:blip>
+          <a:stretch>
+            <a:fillRect/>
+          </a:stretch>
+        </p:blipFill>
+        <p:spPr>
+          <a:xfrm>
+            <a:off x="892945" y="2204864"/>
+            <a:ext cx="8120109" cy="4525963"/>
+          </a:xfrm>
+          <a:prstGeom prst="rect">
+            <a:avLst/>
+          </a:prstGeom>
+          <a:solidFill>
+            <a:srgbClr val="FFFFFF">
+              <a:shade val="85000"/>
+            </a:srgbClr>
+          </a:solidFill>
+          <a:ln w="88900" cap="sq">
+            <a:solidFill>
+              <a:srgbClr val="FFFFFF"/>
+            </a:solidFill>
+            <a:miter lim="800000"/>
+          </a:ln>
+          <a:effectLst>
+            <a:outerShdw blurRad="55000" dist="18000" dir="5400000" algn="tl" rotWithShape="0">
+              <a:srgbClr val="000000">
+                <a:alpha val="40000"/>
+              </a:srgbClr>
+            </a:outerShdw>
+          </a:effectLst>
+          <a:scene3d>
+            <a:camera prst="orthographicFront"/>
+            <a:lightRig rig="twoPt" dir="t">
+              <a:rot lat="0" lon="0" rev="7200000"/>
+            </a:lightRig>
+          </a:scene3d>
+          <a:sp3d>
+            <a:bevelT w="25400" h="19050"/>
+            <a:contourClr>
+              <a:srgbClr val="FFFFFF"/>
+            </a:contourClr>
+          </a:sp3d>
+        </p:spPr>
+      </p:pic>
+      <p:sp>
+        <p:nvSpPr>
+          <p:cNvPr id="4" name="テキスト ボックス 3">
+            <a:extLst>
+              <a:ext uri="{FF2B5EF4-FFF2-40B4-BE49-F238E27FC236}">
+                <a16:creationId xmlns:a16="http://schemas.microsoft.com/office/drawing/2014/main" id="{BE923453-90EA-441A-843B-440B2D80C8EC}"/>
+              </a:ext>
+            </a:extLst>
+          </p:cNvPr>
+          <p:cNvSpPr txBox="1"/>
+          <p:nvPr/>
+        </p:nvSpPr>
+        <p:spPr>
+          <a:xfrm>
+            <a:off x="416496" y="298827"/>
+            <a:ext cx="3005951" cy="769441"/>
+          </a:xfrm>
+          <a:prstGeom prst="rect">
+            <a:avLst/>
+          </a:prstGeom>
+          <a:noFill/>
+        </p:spPr>
+        <p:txBody>
+          <a:bodyPr wrap="none" rtlCol="0">
+            <a:spAutoFit/>
+          </a:bodyPr>
+          <a:lstStyle/>
+          <a:p>
+            <a:r>
+              <a:rPr kumimoji="1" lang="ja-JP" altLang="en-US" sz="4400" b="1" dirty="0"/>
+              <a:t>技術紹介②</a:t>
+            </a:r>
+          </a:p>
+        </p:txBody>
+      </p:sp>
+    </p:spTree>
+    <p:extLst>
+      <p:ext uri="{BB962C8B-B14F-4D97-AF65-F5344CB8AC3E}">
+        <p14:creationId xmlns:p14="http://schemas.microsoft.com/office/powerpoint/2010/main" val="781179589"/>
+      </p:ext>
+    </p:extLst>
+  </p:cSld>
+  <p:clrMapOvr>
+    <a:masterClrMapping/>
+  </p:clrMapOvr>
+</p:sld>
+</file>
+
+<file path=ppt/slides/slide11.xml><?xml version="1.0" encoding="utf-8"?>
+<p:sld xmlns:a="http://schemas.openxmlformats.org/drawingml/2006/main" xmlns:r="http://schemas.openxmlformats.org/officeDocument/2006/relationships" xmlns:p="http://schemas.openxmlformats.org/presentationml/2006/main">
+  <p:cSld>
+    <p:spTree>
+      <p:nvGrpSpPr>
+        <p:cNvPr id="1" name=""/>
+        <p:cNvGrpSpPr/>
+        <p:nvPr/>
+      </p:nvGrpSpPr>
+      <p:grpSpPr>
+        <a:xfrm>
+          <a:off x="0" y="0"/>
+          <a:ext cx="0" cy="0"/>
+          <a:chOff x="0" y="0"/>
+          <a:chExt cx="0" cy="0"/>
+        </a:xfrm>
+      </p:grpSpPr>
+      <p:sp>
+        <p:nvSpPr>
+          <p:cNvPr id="2" name="タイトル 1">
+            <a:extLst>
+              <a:ext uri="{FF2B5EF4-FFF2-40B4-BE49-F238E27FC236}">
+                <a16:creationId xmlns:a16="http://schemas.microsoft.com/office/drawing/2014/main" id="{C543B4AE-CDF1-475B-A0C7-C4282CF03024}"/>
+              </a:ext>
+            </a:extLst>
+          </p:cNvPr>
+          <p:cNvSpPr>
+            <a:spLocks noGrp="1"/>
+          </p:cNvSpPr>
+          <p:nvPr>
+            <p:ph type="title"/>
+          </p:nvPr>
+        </p:nvSpPr>
+        <p:spPr>
+          <a:xfrm>
+            <a:off x="704528" y="1700808"/>
+            <a:ext cx="8915400" cy="1138138"/>
+          </a:xfrm>
+        </p:spPr>
+        <p:txBody>
+          <a:bodyPr>
+            <a:normAutofit/>
+          </a:bodyPr>
+          <a:lstStyle/>
+          <a:p>
+            <a:r>
+              <a:rPr lang="ja-JP" altLang="en-US" sz="2000" dirty="0"/>
+              <a:t>コントローラーのインスタンスを作りシーンが遷移されてもそのコントローラーに割り当てたインプットシステムを持ってきている。</a:t>
+            </a:r>
+            <a:endParaRPr kumimoji="1" lang="ja-JP" altLang="en-US" sz="2000" dirty="0"/>
+          </a:p>
+        </p:txBody>
+      </p:sp>
+      <p:pic>
+        <p:nvPicPr>
+          <p:cNvPr id="5" name="コンテンツ プレースホルダー 4">
+            <a:extLst>
+              <a:ext uri="{FF2B5EF4-FFF2-40B4-BE49-F238E27FC236}">
+                <a16:creationId xmlns:a16="http://schemas.microsoft.com/office/drawing/2014/main" id="{A8050D1F-85C2-4C53-9257-7EED9E913437}"/>
+              </a:ext>
+            </a:extLst>
+          </p:cNvPr>
+          <p:cNvPicPr>
+            <a:picLocks noGrp="1" noChangeAspect="1"/>
+          </p:cNvPicPr>
+          <p:nvPr>
+            <p:ph idx="1"/>
+          </p:nvPr>
+        </p:nvPicPr>
+        <p:blipFill>
+          <a:blip r:embed="rId2">
+            <a:extLst>
+              <a:ext uri="{28A0092B-C50C-407E-A947-70E740481C1C}">
+                <a14:useLocalDpi xmlns:a14="http://schemas.microsoft.com/office/drawing/2010/main" val="0"/>
+              </a:ext>
+            </a:extLst>
+          </a:blip>
+          <a:stretch>
+            <a:fillRect/>
+          </a:stretch>
+        </p:blipFill>
+        <p:spPr>
+          <a:xfrm>
+            <a:off x="2072680" y="3573016"/>
+            <a:ext cx="5877745" cy="2581635"/>
+          </a:xfrm>
+        </p:spPr>
+      </p:pic>
+      <p:sp>
+        <p:nvSpPr>
+          <p:cNvPr id="4" name="テキスト ボックス 3">
+            <a:extLst>
+              <a:ext uri="{FF2B5EF4-FFF2-40B4-BE49-F238E27FC236}">
+                <a16:creationId xmlns:a16="http://schemas.microsoft.com/office/drawing/2014/main" id="{89E7C050-CFCF-4342-A9C4-C08F7C277C68}"/>
+              </a:ext>
+            </a:extLst>
+          </p:cNvPr>
+          <p:cNvSpPr txBox="1"/>
+          <p:nvPr/>
+        </p:nvSpPr>
+        <p:spPr>
+          <a:xfrm>
+            <a:off x="416496" y="298827"/>
+            <a:ext cx="3005951" cy="769441"/>
+          </a:xfrm>
+          <a:prstGeom prst="rect">
+            <a:avLst/>
+          </a:prstGeom>
+          <a:noFill/>
+        </p:spPr>
+        <p:txBody>
+          <a:bodyPr wrap="none" rtlCol="0">
+            <a:spAutoFit/>
+          </a:bodyPr>
+          <a:lstStyle/>
+          <a:p>
+            <a:r>
+              <a:rPr kumimoji="1" lang="ja-JP" altLang="en-US" sz="4400" b="1" dirty="0"/>
+              <a:t>技術紹介③</a:t>
+            </a:r>
+          </a:p>
+        </p:txBody>
+      </p:sp>
+    </p:spTree>
+    <p:extLst>
+      <p:ext uri="{BB962C8B-B14F-4D97-AF65-F5344CB8AC3E}">
+        <p14:creationId xmlns:p14="http://schemas.microsoft.com/office/powerpoint/2010/main" val="4218240706"/>
+      </p:ext>
+    </p:extLst>
+  </p:cSld>
+  <p:clrMapOvr>
+    <a:masterClrMapping/>
+  </p:clrMapOvr>
+</p:sld>
+</file>
+
+<file path=ppt/slides/slide12.xml><?xml version="1.0" encoding="utf-8"?>
+<p:sld xmlns:a="http://schemas.openxmlformats.org/drawingml/2006/main" xmlns:r="http://schemas.openxmlformats.org/officeDocument/2006/relationships" xmlns:p="http://schemas.openxmlformats.org/presentationml/2006/main">
+  <p:cSld>
+    <p:spTree>
+      <p:nvGrpSpPr>
+        <p:cNvPr id="1" name=""/>
+        <p:cNvGrpSpPr/>
+        <p:nvPr/>
+      </p:nvGrpSpPr>
+      <p:grpSpPr>
+        <a:xfrm>
+          <a:off x="0" y="0"/>
+          <a:ext cx="0" cy="0"/>
+          <a:chOff x="0" y="0"/>
+          <a:chExt cx="0" cy="0"/>
+        </a:xfrm>
+      </p:grpSpPr>
+      <p:sp>
+        <p:nvSpPr>
+          <p:cNvPr id="2" name="タイトル 1">
+            <a:extLst>
+              <a:ext uri="{FF2B5EF4-FFF2-40B4-BE49-F238E27FC236}">
+                <a16:creationId xmlns:a16="http://schemas.microsoft.com/office/drawing/2014/main" id="{ADD2447F-5C96-4F09-B72D-AD19AA75C124}"/>
+              </a:ext>
+            </a:extLst>
+          </p:cNvPr>
+          <p:cNvSpPr>
+            <a:spLocks noGrp="1"/>
+          </p:cNvSpPr>
+          <p:nvPr>
+            <p:ph type="title"/>
+          </p:nvPr>
+        </p:nvSpPr>
+        <p:spPr/>
+        <p:txBody>
+          <a:bodyPr/>
+          <a:lstStyle/>
+          <a:p>
+            <a:r>
+              <a:rPr kumimoji="1" lang="ja-JP" altLang="en-US" dirty="0"/>
+              <a:t>これからの目標</a:t>
+            </a:r>
+          </a:p>
+        </p:txBody>
+      </p:sp>
+      <p:sp>
+        <p:nvSpPr>
+          <p:cNvPr id="3" name="コンテンツ プレースホルダー 2">
+            <a:extLst>
+              <a:ext uri="{FF2B5EF4-FFF2-40B4-BE49-F238E27FC236}">
+                <a16:creationId xmlns:a16="http://schemas.microsoft.com/office/drawing/2014/main" id="{D228593A-E1D3-4B29-9078-F56956FDA4A3}"/>
+              </a:ext>
+            </a:extLst>
+          </p:cNvPr>
+          <p:cNvSpPr>
+            <a:spLocks noGrp="1"/>
+          </p:cNvSpPr>
+          <p:nvPr>
+            <p:ph idx="1"/>
+          </p:nvPr>
+        </p:nvSpPr>
+        <p:spPr>
+          <a:xfrm>
+            <a:off x="0" y="1268760"/>
+            <a:ext cx="9906000" cy="5589239"/>
+          </a:xfrm>
+        </p:spPr>
+        <p:txBody>
+          <a:bodyPr/>
+          <a:lstStyle/>
+          <a:p>
+            <a:pPr marL="0" indent="0">
+              <a:buNone/>
+            </a:pPr>
+            <a:r>
+              <a:rPr kumimoji="1" lang="ja-JP" altLang="en-US" dirty="0"/>
+              <a:t>一人のゲームクリエイターのプログラマーとして</a:t>
+            </a:r>
+            <a:r>
+              <a:rPr lang="ja-JP" altLang="en-US" dirty="0"/>
+              <a:t>、ゲームに対して、子供の純粋な心を忘れずに。なぜ面白いのかを明確にプレイヤー全員が言えるようなモデリングを使い綺麗な世界観のアクションゲームを作りたいです。</a:t>
+            </a:r>
+            <a:endParaRPr lang="en-US" altLang="ja-JP" dirty="0"/>
+          </a:p>
+          <a:p>
+            <a:pPr marL="0" indent="0">
+              <a:buNone/>
+            </a:pPr>
+            <a:r>
+              <a:rPr lang="ja-JP" altLang="en-US" dirty="0"/>
+              <a:t>ゲームの世界に終わりは無いと思います。</a:t>
+            </a:r>
+            <a:endParaRPr lang="en-US" altLang="ja-JP" dirty="0"/>
+          </a:p>
+          <a:p>
+            <a:pPr marL="0" indent="0">
+              <a:buNone/>
+            </a:pPr>
+            <a:r>
+              <a:rPr lang="ja-JP" altLang="en-US" dirty="0"/>
+              <a:t>ゲーム</a:t>
+            </a:r>
+            <a:r>
+              <a:rPr kumimoji="1" lang="ja-JP" altLang="en-US" dirty="0"/>
+              <a:t>に対するイマジネーションが尽きない限り、世界を変え、未来永劫これからも面白いゲームは作られていくのだと思います。</a:t>
+            </a:r>
+            <a:endParaRPr kumimoji="1" lang="en-US" altLang="ja-JP" dirty="0"/>
+          </a:p>
+        </p:txBody>
+      </p:sp>
+    </p:spTree>
+    <p:extLst>
+      <p:ext uri="{BB962C8B-B14F-4D97-AF65-F5344CB8AC3E}">
+        <p14:creationId xmlns:p14="http://schemas.microsoft.com/office/powerpoint/2010/main" val="3590431736"/>
+      </p:ext>
+    </p:extLst>
+  </p:cSld>
+  <p:clrMapOvr>
+    <a:masterClrMapping/>
+  </p:clrMapOvr>
+</p:sld>
+</file>
+
 <file path=ppt/slides/slide2.xml><?xml version="1.0" encoding="utf-8"?>
 <p:sld xmlns:a="http://schemas.openxmlformats.org/drawingml/2006/main" xmlns:r="http://schemas.openxmlformats.org/officeDocument/2006/relationships" xmlns:p="http://schemas.openxmlformats.org/presentationml/2006/main">
   <p:cSld>
@@ -4611,6 +5054,336 @@
       </p:grpSpPr>
       <p:sp>
         <p:nvSpPr>
+          <p:cNvPr id="2" name="タイトル 1">
+            <a:extLst>
+              <a:ext uri="{FF2B5EF4-FFF2-40B4-BE49-F238E27FC236}">
+                <a16:creationId xmlns:a16="http://schemas.microsoft.com/office/drawing/2014/main" id="{224A73DE-33EE-4915-8BC1-BEADD356235B}"/>
+              </a:ext>
+            </a:extLst>
+          </p:cNvPr>
+          <p:cNvSpPr>
+            <a:spLocks noGrp="1"/>
+          </p:cNvSpPr>
+          <p:nvPr>
+            <p:ph type="title"/>
+          </p:nvPr>
+        </p:nvSpPr>
+        <p:spPr/>
+        <p:txBody>
+          <a:bodyPr/>
+          <a:lstStyle/>
+          <a:p>
+            <a:pPr algn="l"/>
+            <a:r>
+              <a:rPr lang="ja-JP" altLang="en-US" dirty="0"/>
+              <a:t>制作作品</a:t>
+            </a:r>
+            <a:r>
+              <a:rPr lang="en-US" altLang="ja-JP" dirty="0"/>
+              <a:t>   </a:t>
+            </a:r>
+            <a:endParaRPr kumimoji="1" lang="ja-JP" altLang="en-US" dirty="0"/>
+          </a:p>
+        </p:txBody>
+      </p:sp>
+      <p:sp>
+        <p:nvSpPr>
+          <p:cNvPr id="3" name="コンテンツ プレースホルダー 2">
+            <a:extLst>
+              <a:ext uri="{FF2B5EF4-FFF2-40B4-BE49-F238E27FC236}">
+                <a16:creationId xmlns:a16="http://schemas.microsoft.com/office/drawing/2014/main" id="{2BA5DA61-0B78-4574-85D0-7FB4DDAEEC15}"/>
+              </a:ext>
+            </a:extLst>
+          </p:cNvPr>
+          <p:cNvSpPr>
+            <a:spLocks noGrp="1"/>
+          </p:cNvSpPr>
+          <p:nvPr>
+            <p:ph idx="1"/>
+          </p:nvPr>
+        </p:nvSpPr>
+        <p:spPr/>
+        <p:txBody>
+          <a:bodyPr/>
+          <a:lstStyle/>
+          <a:p>
+            <a:r>
+              <a:rPr lang="en-US" altLang="ja-JP" dirty="0">
+                <a:solidFill>
+                  <a:schemeClr val="bg1"/>
+                </a:solidFill>
+              </a:rPr>
+              <a:t>Cockroach</a:t>
+            </a:r>
+          </a:p>
+          <a:p>
+            <a:r>
+              <a:rPr lang="ja-JP" altLang="en-US" dirty="0">
+                <a:solidFill>
+                  <a:schemeClr val="bg1"/>
+                </a:solidFill>
+              </a:rPr>
+              <a:t>言語　</a:t>
+            </a:r>
+            <a:r>
+              <a:rPr lang="en-US" altLang="ja-JP" dirty="0">
+                <a:solidFill>
+                  <a:schemeClr val="bg1"/>
+                </a:solidFill>
+              </a:rPr>
+              <a:t>C++</a:t>
+            </a:r>
+          </a:p>
+        </p:txBody>
+      </p:sp>
+      <p:pic>
+        <p:nvPicPr>
+          <p:cNvPr id="5" name="図 4">
+            <a:extLst>
+              <a:ext uri="{FF2B5EF4-FFF2-40B4-BE49-F238E27FC236}">
+                <a16:creationId xmlns:a16="http://schemas.microsoft.com/office/drawing/2014/main" id="{6F9195E3-4D03-40EF-8354-F294B66092FB}"/>
+              </a:ext>
+            </a:extLst>
+          </p:cNvPr>
+          <p:cNvPicPr>
+            <a:picLocks noChangeAspect="1"/>
+          </p:cNvPicPr>
+          <p:nvPr/>
+        </p:nvPicPr>
+        <p:blipFill>
+          <a:blip r:embed="rId2">
+            <a:extLst>
+              <a:ext uri="{28A0092B-C50C-407E-A947-70E740481C1C}">
+                <a14:useLocalDpi xmlns:a14="http://schemas.microsoft.com/office/drawing/2010/main" val="0"/>
+              </a:ext>
+            </a:extLst>
+          </a:blip>
+          <a:stretch>
+            <a:fillRect/>
+          </a:stretch>
+        </p:blipFill>
+        <p:spPr>
+          <a:xfrm>
+            <a:off x="4592960" y="476672"/>
+            <a:ext cx="4673724" cy="3529289"/>
+          </a:xfrm>
+          <a:prstGeom prst="rect">
+            <a:avLst/>
+          </a:prstGeom>
+        </p:spPr>
+      </p:pic>
+    </p:spTree>
+    <p:extLst>
+      <p:ext uri="{BB962C8B-B14F-4D97-AF65-F5344CB8AC3E}">
+        <p14:creationId xmlns:p14="http://schemas.microsoft.com/office/powerpoint/2010/main" val="3439998654"/>
+      </p:ext>
+    </p:extLst>
+  </p:cSld>
+  <p:clrMapOvr>
+    <a:masterClrMapping/>
+  </p:clrMapOvr>
+</p:sld>
+</file>
+
+<file path=ppt/slides/slide4.xml><?xml version="1.0" encoding="utf-8"?>
+<p:sld xmlns:a="http://schemas.openxmlformats.org/drawingml/2006/main" xmlns:r="http://schemas.openxmlformats.org/officeDocument/2006/relationships" xmlns:p="http://schemas.openxmlformats.org/presentationml/2006/main">
+  <p:cSld>
+    <p:spTree>
+      <p:nvGrpSpPr>
+        <p:cNvPr id="1" name=""/>
+        <p:cNvGrpSpPr/>
+        <p:nvPr/>
+      </p:nvGrpSpPr>
+      <p:grpSpPr>
+        <a:xfrm>
+          <a:off x="0" y="0"/>
+          <a:ext cx="0" cy="0"/>
+          <a:chOff x="0" y="0"/>
+          <a:chExt cx="0" cy="0"/>
+        </a:xfrm>
+      </p:grpSpPr>
+      <p:sp>
+        <p:nvSpPr>
+          <p:cNvPr id="2" name="タイトル 1">
+            <a:extLst>
+              <a:ext uri="{FF2B5EF4-FFF2-40B4-BE49-F238E27FC236}">
+                <a16:creationId xmlns:a16="http://schemas.microsoft.com/office/drawing/2014/main" id="{FBA80AB6-3E3E-46D4-BC57-09F0F9F76E14}"/>
+              </a:ext>
+            </a:extLst>
+          </p:cNvPr>
+          <p:cNvSpPr>
+            <a:spLocks noGrp="1"/>
+          </p:cNvSpPr>
+          <p:nvPr>
+            <p:ph type="title"/>
+          </p:nvPr>
+        </p:nvSpPr>
+        <p:spPr>
+          <a:xfrm>
+            <a:off x="-159568" y="692696"/>
+            <a:ext cx="9721080" cy="1143000"/>
+          </a:xfrm>
+        </p:spPr>
+        <p:txBody>
+          <a:bodyPr>
+            <a:normAutofit fontScale="90000"/>
+          </a:bodyPr>
+          <a:lstStyle/>
+          <a:p>
+            <a:r>
+              <a:rPr kumimoji="1" lang="ja-JP" altLang="en-US" dirty="0"/>
+              <a:t>・時間いっぱいまで敵から避けるゲーム</a:t>
+            </a:r>
+          </a:p>
+        </p:txBody>
+      </p:sp>
+      <p:pic>
+        <p:nvPicPr>
+          <p:cNvPr id="13" name="コンテンツ プレースホルダー 12">
+            <a:extLst>
+              <a:ext uri="{FF2B5EF4-FFF2-40B4-BE49-F238E27FC236}">
+                <a16:creationId xmlns:a16="http://schemas.microsoft.com/office/drawing/2014/main" id="{5E524F45-1087-42F3-8942-94646D0C9C12}"/>
+              </a:ext>
+            </a:extLst>
+          </p:cNvPr>
+          <p:cNvPicPr>
+            <a:picLocks noGrp="1" noChangeAspect="1"/>
+          </p:cNvPicPr>
+          <p:nvPr>
+            <p:ph idx="1"/>
+          </p:nvPr>
+        </p:nvPicPr>
+        <p:blipFill>
+          <a:blip r:embed="rId2">
+            <a:extLst>
+              <a:ext uri="{28A0092B-C50C-407E-A947-70E740481C1C}">
+                <a14:useLocalDpi xmlns:a14="http://schemas.microsoft.com/office/drawing/2010/main" val="0"/>
+              </a:ext>
+            </a:extLst>
+          </a:blip>
+          <a:stretch>
+            <a:fillRect/>
+          </a:stretch>
+        </p:blipFill>
+        <p:spPr>
+          <a:xfrm>
+            <a:off x="5097016" y="1955984"/>
+            <a:ext cx="4122784" cy="3066321"/>
+          </a:xfrm>
+        </p:spPr>
+      </p:pic>
+    </p:spTree>
+    <p:extLst>
+      <p:ext uri="{BB962C8B-B14F-4D97-AF65-F5344CB8AC3E}">
+        <p14:creationId xmlns:p14="http://schemas.microsoft.com/office/powerpoint/2010/main" val="3331665831"/>
+      </p:ext>
+    </p:extLst>
+  </p:cSld>
+  <p:clrMapOvr>
+    <a:masterClrMapping/>
+  </p:clrMapOvr>
+</p:sld>
+</file>
+
+<file path=ppt/slides/slide5.xml><?xml version="1.0" encoding="utf-8"?>
+<p:sld xmlns:a="http://schemas.openxmlformats.org/drawingml/2006/main" xmlns:r="http://schemas.openxmlformats.org/officeDocument/2006/relationships" xmlns:p="http://schemas.openxmlformats.org/presentationml/2006/main">
+  <p:cSld>
+    <p:spTree>
+      <p:nvGrpSpPr>
+        <p:cNvPr id="1" name=""/>
+        <p:cNvGrpSpPr/>
+        <p:nvPr/>
+      </p:nvGrpSpPr>
+      <p:grpSpPr>
+        <a:xfrm>
+          <a:off x="0" y="0"/>
+          <a:ext cx="0" cy="0"/>
+          <a:chOff x="0" y="0"/>
+          <a:chExt cx="0" cy="0"/>
+        </a:xfrm>
+      </p:grpSpPr>
+      <p:sp>
+        <p:nvSpPr>
+          <p:cNvPr id="2" name="タイトル 1">
+            <a:extLst>
+              <a:ext uri="{FF2B5EF4-FFF2-40B4-BE49-F238E27FC236}">
+                <a16:creationId xmlns:a16="http://schemas.microsoft.com/office/drawing/2014/main" id="{05257D69-6BBB-442D-851C-F8C807FB4BAC}"/>
+              </a:ext>
+            </a:extLst>
+          </p:cNvPr>
+          <p:cNvSpPr>
+            <a:spLocks noGrp="1"/>
+          </p:cNvSpPr>
+          <p:nvPr>
+            <p:ph type="title"/>
+          </p:nvPr>
+        </p:nvSpPr>
+        <p:spPr/>
+        <p:txBody>
+          <a:bodyPr/>
+          <a:lstStyle/>
+          <a:p>
+            <a:endParaRPr kumimoji="1" lang="ja-JP" altLang="en-US" dirty="0"/>
+          </a:p>
+        </p:txBody>
+      </p:sp>
+      <p:sp>
+        <p:nvSpPr>
+          <p:cNvPr id="3" name="コンテンツ プレースホルダー 2">
+            <a:extLst>
+              <a:ext uri="{FF2B5EF4-FFF2-40B4-BE49-F238E27FC236}">
+                <a16:creationId xmlns:a16="http://schemas.microsoft.com/office/drawing/2014/main" id="{D6686291-18D2-4828-BD1D-56D6BB4F6850}"/>
+              </a:ext>
+            </a:extLst>
+          </p:cNvPr>
+          <p:cNvSpPr>
+            <a:spLocks noGrp="1"/>
+          </p:cNvSpPr>
+          <p:nvPr>
+            <p:ph idx="1"/>
+          </p:nvPr>
+        </p:nvSpPr>
+        <p:spPr/>
+        <p:txBody>
+          <a:bodyPr/>
+          <a:lstStyle/>
+          <a:p>
+            <a:endParaRPr kumimoji="1" lang="ja-JP" altLang="en-US"/>
+          </a:p>
+        </p:txBody>
+      </p:sp>
+    </p:spTree>
+    <p:extLst>
+      <p:ext uri="{BB962C8B-B14F-4D97-AF65-F5344CB8AC3E}">
+        <p14:creationId xmlns:p14="http://schemas.microsoft.com/office/powerpoint/2010/main" val="2213262609"/>
+      </p:ext>
+    </p:extLst>
+  </p:cSld>
+  <p:clrMapOvr>
+    <a:masterClrMapping/>
+  </p:clrMapOvr>
+</p:sld>
+</file>
+
+<file path=ppt/slides/slide6.xml><?xml version="1.0" encoding="utf-8"?>
+<p:sld xmlns:a="http://schemas.openxmlformats.org/drawingml/2006/main" xmlns:r="http://schemas.openxmlformats.org/officeDocument/2006/relationships" xmlns:p="http://schemas.openxmlformats.org/presentationml/2006/main">
+  <p:cSld>
+    <p:spTree>
+      <p:nvGrpSpPr>
+        <p:cNvPr id="1" name=""/>
+        <p:cNvGrpSpPr/>
+        <p:nvPr/>
+      </p:nvGrpSpPr>
+      <p:grpSpPr>
+        <a:xfrm>
+          <a:off x="0" y="0"/>
+          <a:ext cx="0" cy="0"/>
+          <a:chOff x="0" y="0"/>
+          <a:chExt cx="0" cy="0"/>
+        </a:xfrm>
+      </p:grpSpPr>
+      <p:sp>
+        <p:nvSpPr>
           <p:cNvPr id="4" name="タイトル 1">
             <a:extLst>
               <a:ext uri="{FF2B5EF4-FFF2-40B4-BE49-F238E27FC236}">
@@ -4672,14 +5445,54 @@
         </p:blipFill>
         <p:spPr>
           <a:xfrm>
-            <a:off x="228219" y="1331640"/>
-            <a:ext cx="9449561" cy="5040560"/>
+            <a:off x="3822517" y="2132856"/>
+            <a:ext cx="5916862" cy="3156157"/>
           </a:xfrm>
           <a:prstGeom prst="rect">
             <a:avLst/>
           </a:prstGeom>
         </p:spPr>
       </p:pic>
+      <p:sp>
+        <p:nvSpPr>
+          <p:cNvPr id="2" name="テキスト ボックス 1">
+            <a:extLst>
+              <a:ext uri="{FF2B5EF4-FFF2-40B4-BE49-F238E27FC236}">
+                <a16:creationId xmlns:a16="http://schemas.microsoft.com/office/drawing/2014/main" id="{D0C04A2C-86CF-46E3-ADB0-B5DC9F6A61EE}"/>
+              </a:ext>
+            </a:extLst>
+          </p:cNvPr>
+          <p:cNvSpPr txBox="1"/>
+          <p:nvPr/>
+        </p:nvSpPr>
+        <p:spPr>
+          <a:xfrm>
+            <a:off x="344488" y="1700808"/>
+            <a:ext cx="3024336" cy="369332"/>
+          </a:xfrm>
+          <a:prstGeom prst="rect">
+            <a:avLst/>
+          </a:prstGeom>
+          <a:noFill/>
+        </p:spPr>
+        <p:txBody>
+          <a:bodyPr wrap="square" rtlCol="0">
+            <a:spAutoFit/>
+          </a:bodyPr>
+          <a:lstStyle/>
+          <a:p>
+            <a:r>
+              <a:rPr lang="ja-JP" altLang="en-US" dirty="0"/>
+              <a:t>・</a:t>
+            </a:r>
+            <a:r>
+              <a:rPr lang="en-US" altLang="ja-JP" dirty="0"/>
+              <a:t>LEVIATHAN</a:t>
+            </a:r>
+            <a:endParaRPr kumimoji="1" lang="ja-JP" altLang="en-US" dirty="0"/>
+          </a:p>
+        </p:txBody>
+      </p:sp>
     </p:spTree>
     <p:extLst>
       <p:ext uri="{BB962C8B-B14F-4D97-AF65-F5344CB8AC3E}">
@@ -4693,7 +5506,7 @@
 </p:sld>
 </file>
 
-<file path=ppt/slides/slide4.xml><?xml version="1.0" encoding="utf-8"?>
+<file path=ppt/slides/slide7.xml><?xml version="1.0" encoding="utf-8"?>
 <p:sld xmlns:a="http://schemas.openxmlformats.org/drawingml/2006/main" xmlns:r="http://schemas.openxmlformats.org/officeDocument/2006/relationships" xmlns:p="http://schemas.openxmlformats.org/presentationml/2006/main">
   <p:cSld>
     <p:bg>
@@ -4966,7 +5779,7 @@
 </p:sld>
 </file>
 
-<file path=ppt/slides/slide5.xml><?xml version="1.0" encoding="utf-8"?>
+<file path=ppt/slides/slide8.xml><?xml version="1.0" encoding="utf-8"?>
 <p:sld xmlns:a="http://schemas.openxmlformats.org/drawingml/2006/main" xmlns:r="http://schemas.openxmlformats.org/officeDocument/2006/relationships" xmlns:p="http://schemas.openxmlformats.org/presentationml/2006/main">
   <p:cSld>
     <p:spTree>
@@ -5145,7 +5958,7 @@
 </p:sld>
 </file>
 
-<file path=ppt/slides/slide6.xml><?xml version="1.0" encoding="utf-8"?>
+<file path=ppt/slides/slide9.xml><?xml version="1.0" encoding="utf-8"?>
 <p:sld xmlns:a="http://schemas.openxmlformats.org/drawingml/2006/main" xmlns:r="http://schemas.openxmlformats.org/officeDocument/2006/relationships" xmlns:p="http://schemas.openxmlformats.org/presentationml/2006/main">
   <p:cSld>
     <p:spTree>
@@ -5424,446 +6237,6 @@
     <p:extLst>
       <p:ext uri="{BB962C8B-B14F-4D97-AF65-F5344CB8AC3E}">
         <p14:creationId xmlns:p14="http://schemas.microsoft.com/office/powerpoint/2010/main" val="1395356119"/>
-      </p:ext>
-    </p:extLst>
-  </p:cSld>
-  <p:clrMapOvr>
-    <a:masterClrMapping/>
-  </p:clrMapOvr>
-</p:sld>
-</file>
-
-<file path=ppt/slides/slide7.xml><?xml version="1.0" encoding="utf-8"?>
-<p:sld xmlns:a="http://schemas.openxmlformats.org/drawingml/2006/main" xmlns:r="http://schemas.openxmlformats.org/officeDocument/2006/relationships" xmlns:p="http://schemas.openxmlformats.org/presentationml/2006/main">
-  <p:cSld>
-    <p:spTree>
-      <p:nvGrpSpPr>
-        <p:cNvPr id="1" name=""/>
-        <p:cNvGrpSpPr/>
-        <p:nvPr/>
-      </p:nvGrpSpPr>
-      <p:grpSpPr>
-        <a:xfrm>
-          <a:off x="0" y="0"/>
-          <a:ext cx="0" cy="0"/>
-          <a:chOff x="0" y="0"/>
-          <a:chExt cx="0" cy="0"/>
-        </a:xfrm>
-      </p:grpSpPr>
-      <p:sp>
-        <p:nvSpPr>
-          <p:cNvPr id="2" name="タイトル 1">
-            <a:extLst>
-              <a:ext uri="{FF2B5EF4-FFF2-40B4-BE49-F238E27FC236}">
-                <a16:creationId xmlns:a16="http://schemas.microsoft.com/office/drawing/2014/main" id="{DEB6D72E-669F-41E1-84C2-19FB59C30903}"/>
-              </a:ext>
-            </a:extLst>
-          </p:cNvPr>
-          <p:cNvSpPr>
-            <a:spLocks noGrp="1"/>
-          </p:cNvSpPr>
-          <p:nvPr>
-            <p:ph type="title"/>
-          </p:nvPr>
-        </p:nvSpPr>
-        <p:spPr>
-          <a:xfrm>
-            <a:off x="495299" y="980728"/>
-            <a:ext cx="8915400" cy="1143000"/>
-          </a:xfrm>
-        </p:spPr>
-        <p:txBody>
-          <a:bodyPr>
-            <a:normAutofit/>
-          </a:bodyPr>
-          <a:lstStyle/>
-          <a:p>
-            <a:r>
-              <a:rPr kumimoji="1" lang="ja-JP" altLang="en-US" sz="2000" dirty="0"/>
-              <a:t>敵の移動</a:t>
-            </a:r>
-            <a:r>
-              <a:rPr lang="ja-JP" altLang="en-US" sz="2000" dirty="0"/>
-              <a:t>は</a:t>
-            </a:r>
-            <a:r>
-              <a:rPr lang="en-US" altLang="ja-JP" sz="2000" dirty="0" err="1"/>
-              <a:t>Navmesh</a:t>
-            </a:r>
-            <a:r>
-              <a:rPr lang="ja-JP" altLang="en-US" sz="2000" dirty="0"/>
-              <a:t>を使い最短距離を出し、エリア内を歩き周り、プレイヤーまでの距離で足音などが変化するようにしている。ついでに敵を状態遷移ごとににスピードや動きなどを変えたりしている。</a:t>
-            </a:r>
-            <a:endParaRPr kumimoji="1" lang="ja-JP" altLang="en-US" sz="2000" dirty="0"/>
-          </a:p>
-        </p:txBody>
-      </p:sp>
-      <p:pic>
-        <p:nvPicPr>
-          <p:cNvPr id="9" name="コンテンツ プレースホルダー 8">
-            <a:extLst>
-              <a:ext uri="{FF2B5EF4-FFF2-40B4-BE49-F238E27FC236}">
-                <a16:creationId xmlns:a16="http://schemas.microsoft.com/office/drawing/2014/main" id="{B9D7BB10-B6EC-4EA5-A2F5-9A0E6DF944D5}"/>
-              </a:ext>
-            </a:extLst>
-          </p:cNvPr>
-          <p:cNvPicPr>
-            <a:picLocks noGrp="1" noChangeAspect="1"/>
-          </p:cNvPicPr>
-          <p:nvPr>
-            <p:ph idx="1"/>
-          </p:nvPr>
-        </p:nvPicPr>
-        <p:blipFill>
-          <a:blip r:embed="rId2">
-            <a:extLst>
-              <a:ext uri="{28A0092B-C50C-407E-A947-70E740481C1C}">
-                <a14:useLocalDpi xmlns:a14="http://schemas.microsoft.com/office/drawing/2010/main" val="0"/>
-              </a:ext>
-            </a:extLst>
-          </a:blip>
-          <a:stretch>
-            <a:fillRect/>
-          </a:stretch>
-        </p:blipFill>
-        <p:spPr>
-          <a:xfrm>
-            <a:off x="892945" y="2204864"/>
-            <a:ext cx="8120109" cy="4525963"/>
-          </a:xfrm>
-          <a:prstGeom prst="rect">
-            <a:avLst/>
-          </a:prstGeom>
-          <a:solidFill>
-            <a:srgbClr val="FFFFFF">
-              <a:shade val="85000"/>
-            </a:srgbClr>
-          </a:solidFill>
-          <a:ln w="88900" cap="sq">
-            <a:solidFill>
-              <a:srgbClr val="FFFFFF"/>
-            </a:solidFill>
-            <a:miter lim="800000"/>
-          </a:ln>
-          <a:effectLst>
-            <a:outerShdw blurRad="55000" dist="18000" dir="5400000" algn="tl" rotWithShape="0">
-              <a:srgbClr val="000000">
-                <a:alpha val="40000"/>
-              </a:srgbClr>
-            </a:outerShdw>
-          </a:effectLst>
-          <a:scene3d>
-            <a:camera prst="orthographicFront"/>
-            <a:lightRig rig="twoPt" dir="t">
-              <a:rot lat="0" lon="0" rev="7200000"/>
-            </a:lightRig>
-          </a:scene3d>
-          <a:sp3d>
-            <a:bevelT w="25400" h="19050"/>
-            <a:contourClr>
-              <a:srgbClr val="FFFFFF"/>
-            </a:contourClr>
-          </a:sp3d>
-        </p:spPr>
-      </p:pic>
-      <p:sp>
-        <p:nvSpPr>
-          <p:cNvPr id="4" name="テキスト ボックス 3">
-            <a:extLst>
-              <a:ext uri="{FF2B5EF4-FFF2-40B4-BE49-F238E27FC236}">
-                <a16:creationId xmlns:a16="http://schemas.microsoft.com/office/drawing/2014/main" id="{BE923453-90EA-441A-843B-440B2D80C8EC}"/>
-              </a:ext>
-            </a:extLst>
-          </p:cNvPr>
-          <p:cNvSpPr txBox="1"/>
-          <p:nvPr/>
-        </p:nvSpPr>
-        <p:spPr>
-          <a:xfrm>
-            <a:off x="416496" y="298827"/>
-            <a:ext cx="3005951" cy="769441"/>
-          </a:xfrm>
-          <a:prstGeom prst="rect">
-            <a:avLst/>
-          </a:prstGeom>
-          <a:noFill/>
-        </p:spPr>
-        <p:txBody>
-          <a:bodyPr wrap="none" rtlCol="0">
-            <a:spAutoFit/>
-          </a:bodyPr>
-          <a:lstStyle/>
-          <a:p>
-            <a:r>
-              <a:rPr kumimoji="1" lang="ja-JP" altLang="en-US" sz="4400" b="1" dirty="0"/>
-              <a:t>技術紹介②</a:t>
-            </a:r>
-          </a:p>
-        </p:txBody>
-      </p:sp>
-    </p:spTree>
-    <p:extLst>
-      <p:ext uri="{BB962C8B-B14F-4D97-AF65-F5344CB8AC3E}">
-        <p14:creationId xmlns:p14="http://schemas.microsoft.com/office/powerpoint/2010/main" val="781179589"/>
-      </p:ext>
-    </p:extLst>
-  </p:cSld>
-  <p:clrMapOvr>
-    <a:masterClrMapping/>
-  </p:clrMapOvr>
-</p:sld>
-</file>
-
-<file path=ppt/slides/slide8.xml><?xml version="1.0" encoding="utf-8"?>
-<p:sld xmlns:a="http://schemas.openxmlformats.org/drawingml/2006/main" xmlns:r="http://schemas.openxmlformats.org/officeDocument/2006/relationships" xmlns:p="http://schemas.openxmlformats.org/presentationml/2006/main">
-  <p:cSld>
-    <p:spTree>
-      <p:nvGrpSpPr>
-        <p:cNvPr id="1" name=""/>
-        <p:cNvGrpSpPr/>
-        <p:nvPr/>
-      </p:nvGrpSpPr>
-      <p:grpSpPr>
-        <a:xfrm>
-          <a:off x="0" y="0"/>
-          <a:ext cx="0" cy="0"/>
-          <a:chOff x="0" y="0"/>
-          <a:chExt cx="0" cy="0"/>
-        </a:xfrm>
-      </p:grpSpPr>
-      <p:sp>
-        <p:nvSpPr>
-          <p:cNvPr id="2" name="タイトル 1">
-            <a:extLst>
-              <a:ext uri="{FF2B5EF4-FFF2-40B4-BE49-F238E27FC236}">
-                <a16:creationId xmlns:a16="http://schemas.microsoft.com/office/drawing/2014/main" id="{C543B4AE-CDF1-475B-A0C7-C4282CF03024}"/>
-              </a:ext>
-            </a:extLst>
-          </p:cNvPr>
-          <p:cNvSpPr>
-            <a:spLocks noGrp="1"/>
-          </p:cNvSpPr>
-          <p:nvPr>
-            <p:ph type="title"/>
-          </p:nvPr>
-        </p:nvSpPr>
-        <p:spPr>
-          <a:xfrm>
-            <a:off x="704528" y="1700808"/>
-            <a:ext cx="8915400" cy="1138138"/>
-          </a:xfrm>
-        </p:spPr>
-        <p:txBody>
-          <a:bodyPr>
-            <a:normAutofit/>
-          </a:bodyPr>
-          <a:lstStyle/>
-          <a:p>
-            <a:r>
-              <a:rPr lang="ja-JP" altLang="en-US" sz="2000" dirty="0"/>
-              <a:t>コントローラーのインスタンスを作りシーンが遷移されてもそのコントローラーに割り当てたインプットシステムを持ってきている。</a:t>
-            </a:r>
-            <a:endParaRPr kumimoji="1" lang="ja-JP" altLang="en-US" sz="2000" dirty="0"/>
-          </a:p>
-        </p:txBody>
-      </p:sp>
-      <p:pic>
-        <p:nvPicPr>
-          <p:cNvPr id="5" name="コンテンツ プレースホルダー 4">
-            <a:extLst>
-              <a:ext uri="{FF2B5EF4-FFF2-40B4-BE49-F238E27FC236}">
-                <a16:creationId xmlns:a16="http://schemas.microsoft.com/office/drawing/2014/main" id="{A8050D1F-85C2-4C53-9257-7EED9E913437}"/>
-              </a:ext>
-            </a:extLst>
-          </p:cNvPr>
-          <p:cNvPicPr>
-            <a:picLocks noGrp="1" noChangeAspect="1"/>
-          </p:cNvPicPr>
-          <p:nvPr>
-            <p:ph idx="1"/>
-          </p:nvPr>
-        </p:nvPicPr>
-        <p:blipFill>
-          <a:blip r:embed="rId2">
-            <a:extLst>
-              <a:ext uri="{28A0092B-C50C-407E-A947-70E740481C1C}">
-                <a14:useLocalDpi xmlns:a14="http://schemas.microsoft.com/office/drawing/2010/main" val="0"/>
-              </a:ext>
-            </a:extLst>
-          </a:blip>
-          <a:stretch>
-            <a:fillRect/>
-          </a:stretch>
-        </p:blipFill>
-        <p:spPr>
-          <a:xfrm>
-            <a:off x="2072680" y="3573016"/>
-            <a:ext cx="5877745" cy="2581635"/>
-          </a:xfrm>
-        </p:spPr>
-      </p:pic>
-      <p:sp>
-        <p:nvSpPr>
-          <p:cNvPr id="4" name="テキスト ボックス 3">
-            <a:extLst>
-              <a:ext uri="{FF2B5EF4-FFF2-40B4-BE49-F238E27FC236}">
-                <a16:creationId xmlns:a16="http://schemas.microsoft.com/office/drawing/2014/main" id="{89E7C050-CFCF-4342-A9C4-C08F7C277C68}"/>
-              </a:ext>
-            </a:extLst>
-          </p:cNvPr>
-          <p:cNvSpPr txBox="1"/>
-          <p:nvPr/>
-        </p:nvSpPr>
-        <p:spPr>
-          <a:xfrm>
-            <a:off x="416496" y="298827"/>
-            <a:ext cx="3005951" cy="769441"/>
-          </a:xfrm>
-          <a:prstGeom prst="rect">
-            <a:avLst/>
-          </a:prstGeom>
-          <a:noFill/>
-        </p:spPr>
-        <p:txBody>
-          <a:bodyPr wrap="none" rtlCol="0">
-            <a:spAutoFit/>
-          </a:bodyPr>
-          <a:lstStyle/>
-          <a:p>
-            <a:r>
-              <a:rPr kumimoji="1" lang="ja-JP" altLang="en-US" sz="4400" b="1" dirty="0"/>
-              <a:t>技術紹介③</a:t>
-            </a:r>
-          </a:p>
-        </p:txBody>
-      </p:sp>
-    </p:spTree>
-    <p:extLst>
-      <p:ext uri="{BB962C8B-B14F-4D97-AF65-F5344CB8AC3E}">
-        <p14:creationId xmlns:p14="http://schemas.microsoft.com/office/powerpoint/2010/main" val="4218240706"/>
-      </p:ext>
-    </p:extLst>
-  </p:cSld>
-  <p:clrMapOvr>
-    <a:masterClrMapping/>
-  </p:clrMapOvr>
-</p:sld>
-</file>
-
-<file path=ppt/slides/slide9.xml><?xml version="1.0" encoding="utf-8"?>
-<p:sld xmlns:a="http://schemas.openxmlformats.org/drawingml/2006/main" xmlns:r="http://schemas.openxmlformats.org/officeDocument/2006/relationships" xmlns:p="http://schemas.openxmlformats.org/presentationml/2006/main">
-  <p:cSld>
-    <p:spTree>
-      <p:nvGrpSpPr>
-        <p:cNvPr id="1" name=""/>
-        <p:cNvGrpSpPr/>
-        <p:nvPr/>
-      </p:nvGrpSpPr>
-      <p:grpSpPr>
-        <a:xfrm>
-          <a:off x="0" y="0"/>
-          <a:ext cx="0" cy="0"/>
-          <a:chOff x="0" y="0"/>
-          <a:chExt cx="0" cy="0"/>
-        </a:xfrm>
-      </p:grpSpPr>
-      <p:sp>
-        <p:nvSpPr>
-          <p:cNvPr id="2" name="タイトル 1">
-            <a:extLst>
-              <a:ext uri="{FF2B5EF4-FFF2-40B4-BE49-F238E27FC236}">
-                <a16:creationId xmlns:a16="http://schemas.microsoft.com/office/drawing/2014/main" id="{ADD2447F-5C96-4F09-B72D-AD19AA75C124}"/>
-              </a:ext>
-            </a:extLst>
-          </p:cNvPr>
-          <p:cNvSpPr>
-            <a:spLocks noGrp="1"/>
-          </p:cNvSpPr>
-          <p:nvPr>
-            <p:ph type="title"/>
-          </p:nvPr>
-        </p:nvSpPr>
-        <p:spPr/>
-        <p:txBody>
-          <a:bodyPr/>
-          <a:lstStyle/>
-          <a:p>
-            <a:r>
-              <a:rPr kumimoji="1" lang="ja-JP" altLang="en-US" dirty="0"/>
-              <a:t>これからの目標</a:t>
-            </a:r>
-          </a:p>
-        </p:txBody>
-      </p:sp>
-      <p:sp>
-        <p:nvSpPr>
-          <p:cNvPr id="3" name="コンテンツ プレースホルダー 2">
-            <a:extLst>
-              <a:ext uri="{FF2B5EF4-FFF2-40B4-BE49-F238E27FC236}">
-                <a16:creationId xmlns:a16="http://schemas.microsoft.com/office/drawing/2014/main" id="{D228593A-E1D3-4B29-9078-F56956FDA4A3}"/>
-              </a:ext>
-            </a:extLst>
-          </p:cNvPr>
-          <p:cNvSpPr>
-            <a:spLocks noGrp="1"/>
-          </p:cNvSpPr>
-          <p:nvPr>
-            <p:ph idx="1"/>
-          </p:nvPr>
-        </p:nvSpPr>
-        <p:spPr>
-          <a:xfrm>
-            <a:off x="0" y="1268760"/>
-            <a:ext cx="9906000" cy="5589239"/>
-          </a:xfrm>
-        </p:spPr>
-        <p:txBody>
-          <a:bodyPr/>
-          <a:lstStyle/>
-          <a:p>
-            <a:pPr marL="0" indent="0">
-              <a:buNone/>
-            </a:pPr>
-            <a:r>
-              <a:rPr kumimoji="1" lang="ja-JP" altLang="en-US" dirty="0"/>
-              <a:t>一人のゲームクリエイターのプログラマーとして</a:t>
-            </a:r>
-            <a:r>
-              <a:rPr lang="ja-JP" altLang="en-US" dirty="0"/>
-              <a:t>、ゲームに対して、子供の純粋な心を忘れずに。なぜ面白いのかを明確にプレイヤー全員が言えるようなモデリングを使い綺麗な世界観のアクションゲームを作りたいです。</a:t>
-            </a:r>
-            <a:endParaRPr lang="en-US" altLang="ja-JP" dirty="0"/>
-          </a:p>
-          <a:p>
-            <a:pPr marL="0" indent="0">
-              <a:buNone/>
-            </a:pPr>
-            <a:r>
-              <a:rPr lang="ja-JP" altLang="en-US" dirty="0"/>
-              <a:t>ゲームの世界に終わりは無いと思います。</a:t>
-            </a:r>
-            <a:endParaRPr lang="en-US" altLang="ja-JP" dirty="0"/>
-          </a:p>
-          <a:p>
-            <a:pPr marL="0" indent="0">
-              <a:buNone/>
-            </a:pPr>
-            <a:r>
-              <a:rPr lang="ja-JP" altLang="en-US" dirty="0"/>
-              <a:t>ゲーム</a:t>
-            </a:r>
-            <a:r>
-              <a:rPr kumimoji="1" lang="ja-JP" altLang="en-US" dirty="0"/>
-              <a:t>に対するイマジネーションが尽きない限り、世界を変え、未来永劫これからも面白いゲームは作られていくのだと思います。</a:t>
-            </a:r>
-            <a:endParaRPr kumimoji="1" lang="en-US" altLang="ja-JP" dirty="0"/>
-          </a:p>
-        </p:txBody>
-      </p:sp>
-    </p:spTree>
-    <p:extLst>
-      <p:ext uri="{BB962C8B-B14F-4D97-AF65-F5344CB8AC3E}">
-        <p14:creationId xmlns:p14="http://schemas.microsoft.com/office/powerpoint/2010/main" val="3590431736"/>
       </p:ext>
     </p:extLst>
   </p:cSld>

--- a/ポートフォリオ.pptx
+++ b/ポートフォリオ.pptx
@@ -5,24 +5,23 @@
     <p:sldMasterId id="2147483648" r:id="rId1"/>
   </p:sldMasterIdLst>
   <p:notesMasterIdLst>
-    <p:notesMasterId r:id="rId14"/>
+    <p:notesMasterId r:id="rId13"/>
   </p:notesMasterIdLst>
   <p:handoutMasterIdLst>
-    <p:handoutMasterId r:id="rId15"/>
+    <p:handoutMasterId r:id="rId14"/>
   </p:handoutMasterIdLst>
   <p:sldIdLst>
     <p:sldId id="259" r:id="rId2"/>
     <p:sldId id="265" r:id="rId3"/>
     <p:sldId id="267" r:id="rId4"/>
     <p:sldId id="268" r:id="rId5"/>
-    <p:sldId id="269" r:id="rId6"/>
-    <p:sldId id="266" r:id="rId7"/>
-    <p:sldId id="257" r:id="rId8"/>
-    <p:sldId id="263" r:id="rId9"/>
-    <p:sldId id="258" r:id="rId10"/>
-    <p:sldId id="260" r:id="rId11"/>
-    <p:sldId id="261" r:id="rId12"/>
-    <p:sldId id="264" r:id="rId13"/>
+    <p:sldId id="266" r:id="rId6"/>
+    <p:sldId id="257" r:id="rId7"/>
+    <p:sldId id="263" r:id="rId8"/>
+    <p:sldId id="258" r:id="rId9"/>
+    <p:sldId id="260" r:id="rId10"/>
+    <p:sldId id="261" r:id="rId11"/>
+    <p:sldId id="264" r:id="rId12"/>
   </p:sldIdLst>
   <p:sldSz cx="9906000" cy="6858000" type="A4"/>
   <p:notesSz cx="6858000" cy="9144000"/>
@@ -237,7 +236,7 @@
           <a:p>
             <a:fld id="{DE2EB211-95CE-4465-AE82-71FC1BD57B75}" type="datetimeFigureOut">
               <a:rPr kumimoji="1" lang="ja-JP" altLang="en-US" smtClean="0"/>
-              <a:t>2025/9/25</a:t>
+              <a:t>2025/10/6</a:t>
             </a:fld>
             <a:endParaRPr kumimoji="1" lang="ja-JP" altLang="en-US"/>
           </a:p>
@@ -414,7 +413,7 @@
           <a:p>
             <a:fld id="{4955FFDA-CD2B-48C3-9523-160A6827052C}" type="datetimeFigureOut">
               <a:rPr kumimoji="1" lang="ja-JP" altLang="en-US" smtClean="0"/>
-              <a:t>2025/9/25</a:t>
+              <a:t>2025/10/6</a:t>
             </a:fld>
             <a:endParaRPr kumimoji="1" lang="ja-JP" altLang="en-US"/>
           </a:p>
@@ -783,7 +782,7 @@
           <a:p>
             <a:fld id="{4E0F9C1C-2F35-4495-ABDD-C1C7C22641EE}" type="slidenum">
               <a:rPr kumimoji="1" lang="ja-JP" altLang="en-US" smtClean="0"/>
-              <a:t>7</a:t>
+              <a:t>6</a:t>
             </a:fld>
             <a:endParaRPr kumimoji="1" lang="ja-JP" altLang="en-US"/>
           </a:p>
@@ -867,7 +866,7 @@
           <a:p>
             <a:fld id="{4E0F9C1C-2F35-4495-ABDD-C1C7C22641EE}" type="slidenum">
               <a:rPr kumimoji="1" lang="ja-JP" altLang="en-US" smtClean="0"/>
-              <a:t>8</a:t>
+              <a:t>7</a:t>
             </a:fld>
             <a:endParaRPr kumimoji="1" lang="ja-JP" altLang="en-US"/>
           </a:p>
@@ -1065,7 +1064,7 @@
           <a:p>
             <a:fld id="{1A82EE06-D961-426C-A9FF-E6B541017B60}" type="datetimeFigureOut">
               <a:rPr kumimoji="1" lang="ja-JP" altLang="en-US" smtClean="0"/>
-              <a:t>2025/9/25</a:t>
+              <a:t>2025/10/6</a:t>
             </a:fld>
             <a:endParaRPr kumimoji="1" lang="ja-JP" altLang="en-US"/>
           </a:p>
@@ -1265,7 +1264,7 @@
           <a:p>
             <a:fld id="{1A82EE06-D961-426C-A9FF-E6B541017B60}" type="datetimeFigureOut">
               <a:rPr kumimoji="1" lang="ja-JP" altLang="en-US" smtClean="0"/>
-              <a:t>2025/9/25</a:t>
+              <a:t>2025/10/6</a:t>
             </a:fld>
             <a:endParaRPr kumimoji="1" lang="ja-JP" altLang="en-US"/>
           </a:p>
@@ -1475,7 +1474,7 @@
           <a:p>
             <a:fld id="{1A82EE06-D961-426C-A9FF-E6B541017B60}" type="datetimeFigureOut">
               <a:rPr kumimoji="1" lang="ja-JP" altLang="en-US" smtClean="0"/>
-              <a:t>2025/9/25</a:t>
+              <a:t>2025/10/6</a:t>
             </a:fld>
             <a:endParaRPr kumimoji="1" lang="ja-JP" altLang="en-US"/>
           </a:p>
@@ -1675,7 +1674,7 @@
           <a:p>
             <a:fld id="{1A82EE06-D961-426C-A9FF-E6B541017B60}" type="datetimeFigureOut">
               <a:rPr kumimoji="1" lang="ja-JP" altLang="en-US" smtClean="0"/>
-              <a:t>2025/9/25</a:t>
+              <a:t>2025/10/6</a:t>
             </a:fld>
             <a:endParaRPr kumimoji="1" lang="ja-JP" altLang="en-US"/>
           </a:p>
@@ -1920,7 +1919,7 @@
           <a:p>
             <a:fld id="{1A82EE06-D961-426C-A9FF-E6B541017B60}" type="datetimeFigureOut">
               <a:rPr kumimoji="1" lang="ja-JP" altLang="en-US" smtClean="0"/>
-              <a:t>2025/9/25</a:t>
+              <a:t>2025/10/6</a:t>
             </a:fld>
             <a:endParaRPr kumimoji="1" lang="ja-JP" altLang="en-US"/>
           </a:p>
@@ -2269,7 +2268,7 @@
           <a:p>
             <a:fld id="{1A82EE06-D961-426C-A9FF-E6B541017B60}" type="datetimeFigureOut">
               <a:rPr kumimoji="1" lang="ja-JP" altLang="en-US" smtClean="0"/>
-              <a:t>2025/9/25</a:t>
+              <a:t>2025/10/6</a:t>
             </a:fld>
             <a:endParaRPr kumimoji="1" lang="ja-JP" altLang="en-US"/>
           </a:p>
@@ -2752,7 +2751,7 @@
           <a:p>
             <a:fld id="{1A82EE06-D961-426C-A9FF-E6B541017B60}" type="datetimeFigureOut">
               <a:rPr kumimoji="1" lang="ja-JP" altLang="en-US" smtClean="0"/>
-              <a:t>2025/9/25</a:t>
+              <a:t>2025/10/6</a:t>
             </a:fld>
             <a:endParaRPr kumimoji="1" lang="ja-JP" altLang="en-US"/>
           </a:p>
@@ -2869,7 +2868,7 @@
           <a:p>
             <a:fld id="{1A82EE06-D961-426C-A9FF-E6B541017B60}" type="datetimeFigureOut">
               <a:rPr kumimoji="1" lang="ja-JP" altLang="en-US" smtClean="0"/>
-              <a:t>2025/9/25</a:t>
+              <a:t>2025/10/6</a:t>
             </a:fld>
             <a:endParaRPr kumimoji="1" lang="ja-JP" altLang="en-US"/>
           </a:p>
@@ -2964,7 +2963,7 @@
           <a:p>
             <a:fld id="{1A82EE06-D961-426C-A9FF-E6B541017B60}" type="datetimeFigureOut">
               <a:rPr kumimoji="1" lang="ja-JP" altLang="en-US" smtClean="0"/>
-              <a:t>2025/9/25</a:t>
+              <a:t>2025/10/6</a:t>
             </a:fld>
             <a:endParaRPr kumimoji="1" lang="ja-JP" altLang="en-US"/>
           </a:p>
@@ -3271,7 +3270,7 @@
           <a:p>
             <a:fld id="{1A82EE06-D961-426C-A9FF-E6B541017B60}" type="datetimeFigureOut">
               <a:rPr kumimoji="1" lang="ja-JP" altLang="en-US" smtClean="0"/>
-              <a:t>2025/9/25</a:t>
+              <a:t>2025/10/6</a:t>
             </a:fld>
             <a:endParaRPr kumimoji="1" lang="ja-JP" altLang="en-US"/>
           </a:p>
@@ -3523,7 +3522,7 @@
           <a:p>
             <a:fld id="{1A82EE06-D961-426C-A9FF-E6B541017B60}" type="datetimeFigureOut">
               <a:rPr kumimoji="1" lang="ja-JP" altLang="en-US" smtClean="0"/>
-              <a:t>2025/9/25</a:t>
+              <a:t>2025/10/6</a:t>
             </a:fld>
             <a:endParaRPr kumimoji="1" lang="ja-JP" altLang="en-US"/>
           </a:p>
@@ -3775,7 +3774,7 @@
           <a:p>
             <a:fld id="{1A82EE06-D961-426C-A9FF-E6B541017B60}" type="datetimeFigureOut">
               <a:rPr kumimoji="1" lang="ja-JP" altLang="en-US" smtClean="0"/>
-              <a:t>2025/9/25</a:t>
+              <a:t>2025/10/6</a:t>
             </a:fld>
             <a:endParaRPr kumimoji="1" lang="ja-JP" altLang="en-US"/>
           </a:p>
@@ -4435,187 +4434,6 @@
           <p:cNvPr id="2" name="タイトル 1">
             <a:extLst>
               <a:ext uri="{FF2B5EF4-FFF2-40B4-BE49-F238E27FC236}">
-                <a16:creationId xmlns:a16="http://schemas.microsoft.com/office/drawing/2014/main" id="{DEB6D72E-669F-41E1-84C2-19FB59C30903}"/>
-              </a:ext>
-            </a:extLst>
-          </p:cNvPr>
-          <p:cNvSpPr>
-            <a:spLocks noGrp="1"/>
-          </p:cNvSpPr>
-          <p:nvPr>
-            <p:ph type="title"/>
-          </p:nvPr>
-        </p:nvSpPr>
-        <p:spPr>
-          <a:xfrm>
-            <a:off x="495299" y="980728"/>
-            <a:ext cx="8915400" cy="1143000"/>
-          </a:xfrm>
-        </p:spPr>
-        <p:txBody>
-          <a:bodyPr>
-            <a:normAutofit/>
-          </a:bodyPr>
-          <a:lstStyle/>
-          <a:p>
-            <a:r>
-              <a:rPr kumimoji="1" lang="ja-JP" altLang="en-US" sz="2000" dirty="0"/>
-              <a:t>敵の移動</a:t>
-            </a:r>
-            <a:r>
-              <a:rPr lang="ja-JP" altLang="en-US" sz="2000" dirty="0"/>
-              <a:t>は</a:t>
-            </a:r>
-            <a:r>
-              <a:rPr lang="en-US" altLang="ja-JP" sz="2000" dirty="0" err="1"/>
-              <a:t>Navmesh</a:t>
-            </a:r>
-            <a:r>
-              <a:rPr lang="ja-JP" altLang="en-US" sz="2000" dirty="0"/>
-              <a:t>を使い最短距離を出し、エリア内を歩き周り、プレイヤーまでの距離で足音などが変化するようにしている。ついでに敵を状態遷移ごとににスピードや動きなどを変えたりしている。</a:t>
-            </a:r>
-            <a:endParaRPr kumimoji="1" lang="ja-JP" altLang="en-US" sz="2000" dirty="0"/>
-          </a:p>
-        </p:txBody>
-      </p:sp>
-      <p:pic>
-        <p:nvPicPr>
-          <p:cNvPr id="9" name="コンテンツ プレースホルダー 8">
-            <a:extLst>
-              <a:ext uri="{FF2B5EF4-FFF2-40B4-BE49-F238E27FC236}">
-                <a16:creationId xmlns:a16="http://schemas.microsoft.com/office/drawing/2014/main" id="{B9D7BB10-B6EC-4EA5-A2F5-9A0E6DF944D5}"/>
-              </a:ext>
-            </a:extLst>
-          </p:cNvPr>
-          <p:cNvPicPr>
-            <a:picLocks noGrp="1" noChangeAspect="1"/>
-          </p:cNvPicPr>
-          <p:nvPr>
-            <p:ph idx="1"/>
-          </p:nvPr>
-        </p:nvPicPr>
-        <p:blipFill>
-          <a:blip r:embed="rId2">
-            <a:extLst>
-              <a:ext uri="{28A0092B-C50C-407E-A947-70E740481C1C}">
-                <a14:useLocalDpi xmlns:a14="http://schemas.microsoft.com/office/drawing/2010/main" val="0"/>
-              </a:ext>
-            </a:extLst>
-          </a:blip>
-          <a:stretch>
-            <a:fillRect/>
-          </a:stretch>
-        </p:blipFill>
-        <p:spPr>
-          <a:xfrm>
-            <a:off x="892945" y="2204864"/>
-            <a:ext cx="8120109" cy="4525963"/>
-          </a:xfrm>
-          <a:prstGeom prst="rect">
-            <a:avLst/>
-          </a:prstGeom>
-          <a:solidFill>
-            <a:srgbClr val="FFFFFF">
-              <a:shade val="85000"/>
-            </a:srgbClr>
-          </a:solidFill>
-          <a:ln w="88900" cap="sq">
-            <a:solidFill>
-              <a:srgbClr val="FFFFFF"/>
-            </a:solidFill>
-            <a:miter lim="800000"/>
-          </a:ln>
-          <a:effectLst>
-            <a:outerShdw blurRad="55000" dist="18000" dir="5400000" algn="tl" rotWithShape="0">
-              <a:srgbClr val="000000">
-                <a:alpha val="40000"/>
-              </a:srgbClr>
-            </a:outerShdw>
-          </a:effectLst>
-          <a:scene3d>
-            <a:camera prst="orthographicFront"/>
-            <a:lightRig rig="twoPt" dir="t">
-              <a:rot lat="0" lon="0" rev="7200000"/>
-            </a:lightRig>
-          </a:scene3d>
-          <a:sp3d>
-            <a:bevelT w="25400" h="19050"/>
-            <a:contourClr>
-              <a:srgbClr val="FFFFFF"/>
-            </a:contourClr>
-          </a:sp3d>
-        </p:spPr>
-      </p:pic>
-      <p:sp>
-        <p:nvSpPr>
-          <p:cNvPr id="4" name="テキスト ボックス 3">
-            <a:extLst>
-              <a:ext uri="{FF2B5EF4-FFF2-40B4-BE49-F238E27FC236}">
-                <a16:creationId xmlns:a16="http://schemas.microsoft.com/office/drawing/2014/main" id="{BE923453-90EA-441A-843B-440B2D80C8EC}"/>
-              </a:ext>
-            </a:extLst>
-          </p:cNvPr>
-          <p:cNvSpPr txBox="1"/>
-          <p:nvPr/>
-        </p:nvSpPr>
-        <p:spPr>
-          <a:xfrm>
-            <a:off x="416496" y="298827"/>
-            <a:ext cx="3005951" cy="769441"/>
-          </a:xfrm>
-          <a:prstGeom prst="rect">
-            <a:avLst/>
-          </a:prstGeom>
-          <a:noFill/>
-        </p:spPr>
-        <p:txBody>
-          <a:bodyPr wrap="none" rtlCol="0">
-            <a:spAutoFit/>
-          </a:bodyPr>
-          <a:lstStyle/>
-          <a:p>
-            <a:r>
-              <a:rPr kumimoji="1" lang="ja-JP" altLang="en-US" sz="4400" b="1" dirty="0"/>
-              <a:t>技術紹介②</a:t>
-            </a:r>
-          </a:p>
-        </p:txBody>
-      </p:sp>
-    </p:spTree>
-    <p:extLst>
-      <p:ext uri="{BB962C8B-B14F-4D97-AF65-F5344CB8AC3E}">
-        <p14:creationId xmlns:p14="http://schemas.microsoft.com/office/powerpoint/2010/main" val="781179589"/>
-      </p:ext>
-    </p:extLst>
-  </p:cSld>
-  <p:clrMapOvr>
-    <a:masterClrMapping/>
-  </p:clrMapOvr>
-</p:sld>
-</file>
-
-<file path=ppt/slides/slide11.xml><?xml version="1.0" encoding="utf-8"?>
-<p:sld xmlns:a="http://schemas.openxmlformats.org/drawingml/2006/main" xmlns:r="http://schemas.openxmlformats.org/officeDocument/2006/relationships" xmlns:p="http://schemas.openxmlformats.org/presentationml/2006/main">
-  <p:cSld>
-    <p:spTree>
-      <p:nvGrpSpPr>
-        <p:cNvPr id="1" name=""/>
-        <p:cNvGrpSpPr/>
-        <p:nvPr/>
-      </p:nvGrpSpPr>
-      <p:grpSpPr>
-        <a:xfrm>
-          <a:off x="0" y="0"/>
-          <a:ext cx="0" cy="0"/>
-          <a:chOff x="0" y="0"/>
-          <a:chExt cx="0" cy="0"/>
-        </a:xfrm>
-      </p:grpSpPr>
-      <p:sp>
-        <p:nvSpPr>
-          <p:cNvPr id="2" name="タイトル 1">
-            <a:extLst>
-              <a:ext uri="{FF2B5EF4-FFF2-40B4-BE49-F238E27FC236}">
                 <a16:creationId xmlns:a16="http://schemas.microsoft.com/office/drawing/2014/main" id="{C543B4AE-CDF1-475B-A0C7-C4282CF03024}"/>
               </a:ext>
             </a:extLst>
@@ -4730,7 +4548,7 @@
 </p:sld>
 </file>
 
-<file path=ppt/slides/slide12.xml><?xml version="1.0" encoding="utf-8"?>
+<file path=ppt/slides/slide11.xml><?xml version="1.0" encoding="utf-8"?>
 <p:sld xmlns:a="http://schemas.openxmlformats.org/drawingml/2006/main" xmlns:r="http://schemas.openxmlformats.org/officeDocument/2006/relationships" xmlns:p="http://schemas.openxmlformats.org/presentationml/2006/main">
   <p:cSld>
     <p:spTree>
@@ -5102,7 +4920,12 @@
             <p:ph idx="1"/>
           </p:nvPr>
         </p:nvSpPr>
-        <p:spPr/>
+        <p:spPr>
+          <a:xfrm>
+            <a:off x="20171" y="1628800"/>
+            <a:ext cx="8915400" cy="4525963"/>
+          </a:xfrm>
+        </p:spPr>
         <p:txBody>
           <a:bodyPr/>
           <a:lstStyle/>
@@ -5133,6 +4956,21 @@
               </a:rPr>
               <a:t>C++</a:t>
             </a:r>
+          </a:p>
+          <a:p>
+            <a:r>
+              <a:rPr lang="ja-JP" altLang="en-US" dirty="0">
+                <a:solidFill>
+                  <a:schemeClr val="bg1"/>
+                </a:solidFill>
+              </a:rPr>
+              <a:t>本格的なゲーム作成として行った最初の製作作品です。</a:t>
+            </a:r>
+            <a:endParaRPr lang="en-US" altLang="ja-JP" dirty="0">
+              <a:solidFill>
+                <a:schemeClr val="bg1"/>
+              </a:solidFill>
+            </a:endParaRPr>
           </a:p>
         </p:txBody>
       </p:sp>
@@ -5164,8 +5002,8 @@
         </p:blipFill>
         <p:spPr>
           <a:xfrm>
-            <a:off x="4592960" y="476672"/>
-            <a:ext cx="4673724" cy="3529289"/>
+            <a:off x="4468371" y="3429000"/>
+            <a:ext cx="4464496" cy="3000342"/>
           </a:xfrm>
           <a:prstGeom prst="rect">
             <a:avLst/>
@@ -5220,8 +5058,8 @@
         </p:nvSpPr>
         <p:spPr>
           <a:xfrm>
-            <a:off x="-159568" y="692696"/>
-            <a:ext cx="9721080" cy="1143000"/>
+            <a:off x="-303584" y="1052736"/>
+            <a:ext cx="10009112" cy="1143000"/>
           </a:xfrm>
         </p:spPr>
         <p:txBody>
@@ -5232,7 +5070,7 @@
           <a:p>
             <a:r>
               <a:rPr kumimoji="1" lang="ja-JP" altLang="en-US" dirty="0"/>
-              <a:t>・時間いっぱいまで敵から避けるゲーム</a:t>
+              <a:t>・時間いっぱいまでジャンプで敵から避けるゲーム</a:t>
             </a:r>
           </a:p>
         </p:txBody>
@@ -5267,7 +5105,7 @@
         </p:blipFill>
         <p:spPr>
           <a:xfrm>
-            <a:off x="5097016" y="1955984"/>
+            <a:off x="5385048" y="2852936"/>
             <a:ext cx="4122784" cy="3066321"/>
           </a:xfrm>
         </p:spPr>
@@ -5286,86 +5124,6 @@
 </file>
 
 <file path=ppt/slides/slide5.xml><?xml version="1.0" encoding="utf-8"?>
-<p:sld xmlns:a="http://schemas.openxmlformats.org/drawingml/2006/main" xmlns:r="http://schemas.openxmlformats.org/officeDocument/2006/relationships" xmlns:p="http://schemas.openxmlformats.org/presentationml/2006/main">
-  <p:cSld>
-    <p:spTree>
-      <p:nvGrpSpPr>
-        <p:cNvPr id="1" name=""/>
-        <p:cNvGrpSpPr/>
-        <p:nvPr/>
-      </p:nvGrpSpPr>
-      <p:grpSpPr>
-        <a:xfrm>
-          <a:off x="0" y="0"/>
-          <a:ext cx="0" cy="0"/>
-          <a:chOff x="0" y="0"/>
-          <a:chExt cx="0" cy="0"/>
-        </a:xfrm>
-      </p:grpSpPr>
-      <p:sp>
-        <p:nvSpPr>
-          <p:cNvPr id="2" name="タイトル 1">
-            <a:extLst>
-              <a:ext uri="{FF2B5EF4-FFF2-40B4-BE49-F238E27FC236}">
-                <a16:creationId xmlns:a16="http://schemas.microsoft.com/office/drawing/2014/main" id="{05257D69-6BBB-442D-851C-F8C807FB4BAC}"/>
-              </a:ext>
-            </a:extLst>
-          </p:cNvPr>
-          <p:cNvSpPr>
-            <a:spLocks noGrp="1"/>
-          </p:cNvSpPr>
-          <p:nvPr>
-            <p:ph type="title"/>
-          </p:nvPr>
-        </p:nvSpPr>
-        <p:spPr/>
-        <p:txBody>
-          <a:bodyPr/>
-          <a:lstStyle/>
-          <a:p>
-            <a:endParaRPr kumimoji="1" lang="ja-JP" altLang="en-US" dirty="0"/>
-          </a:p>
-        </p:txBody>
-      </p:sp>
-      <p:sp>
-        <p:nvSpPr>
-          <p:cNvPr id="3" name="コンテンツ プレースホルダー 2">
-            <a:extLst>
-              <a:ext uri="{FF2B5EF4-FFF2-40B4-BE49-F238E27FC236}">
-                <a16:creationId xmlns:a16="http://schemas.microsoft.com/office/drawing/2014/main" id="{D6686291-18D2-4828-BD1D-56D6BB4F6850}"/>
-              </a:ext>
-            </a:extLst>
-          </p:cNvPr>
-          <p:cNvSpPr>
-            <a:spLocks noGrp="1"/>
-          </p:cNvSpPr>
-          <p:nvPr>
-            <p:ph idx="1"/>
-          </p:nvPr>
-        </p:nvSpPr>
-        <p:spPr/>
-        <p:txBody>
-          <a:bodyPr/>
-          <a:lstStyle/>
-          <a:p>
-            <a:endParaRPr kumimoji="1" lang="ja-JP" altLang="en-US"/>
-          </a:p>
-        </p:txBody>
-      </p:sp>
-    </p:spTree>
-    <p:extLst>
-      <p:ext uri="{BB962C8B-B14F-4D97-AF65-F5344CB8AC3E}">
-        <p14:creationId xmlns:p14="http://schemas.microsoft.com/office/powerpoint/2010/main" val="2213262609"/>
-      </p:ext>
-    </p:extLst>
-  </p:cSld>
-  <p:clrMapOvr>
-    <a:masterClrMapping/>
-  </p:clrMapOvr>
-</p:sld>
-</file>
-
-<file path=ppt/slides/slide6.xml><?xml version="1.0" encoding="utf-8"?>
 <p:sld xmlns:a="http://schemas.openxmlformats.org/drawingml/2006/main" xmlns:r="http://schemas.openxmlformats.org/officeDocument/2006/relationships" xmlns:p="http://schemas.openxmlformats.org/presentationml/2006/main">
   <p:cSld>
     <p:spTree>
@@ -5506,7 +5264,7 @@
 </p:sld>
 </file>
 
-<file path=ppt/slides/slide7.xml><?xml version="1.0" encoding="utf-8"?>
+<file path=ppt/slides/slide6.xml><?xml version="1.0" encoding="utf-8"?>
 <p:sld xmlns:a="http://schemas.openxmlformats.org/drawingml/2006/main" xmlns:r="http://schemas.openxmlformats.org/officeDocument/2006/relationships" xmlns:p="http://schemas.openxmlformats.org/presentationml/2006/main">
   <p:cSld>
     <p:bg>
@@ -5779,7 +5537,7 @@
 </p:sld>
 </file>
 
-<file path=ppt/slides/slide8.xml><?xml version="1.0" encoding="utf-8"?>
+<file path=ppt/slides/slide7.xml><?xml version="1.0" encoding="utf-8"?>
 <p:sld xmlns:a="http://schemas.openxmlformats.org/drawingml/2006/main" xmlns:r="http://schemas.openxmlformats.org/officeDocument/2006/relationships" xmlns:p="http://schemas.openxmlformats.org/presentationml/2006/main">
   <p:cSld>
     <p:spTree>
@@ -5958,7 +5716,7 @@
 </p:sld>
 </file>
 
-<file path=ppt/slides/slide9.xml><?xml version="1.0" encoding="utf-8"?>
+<file path=ppt/slides/slide8.xml><?xml version="1.0" encoding="utf-8"?>
 <p:sld xmlns:a="http://schemas.openxmlformats.org/drawingml/2006/main" xmlns:r="http://schemas.openxmlformats.org/officeDocument/2006/relationships" xmlns:p="http://schemas.openxmlformats.org/presentationml/2006/main">
   <p:cSld>
     <p:spTree>
@@ -6237,6 +5995,187 @@
     <p:extLst>
       <p:ext uri="{BB962C8B-B14F-4D97-AF65-F5344CB8AC3E}">
         <p14:creationId xmlns:p14="http://schemas.microsoft.com/office/powerpoint/2010/main" val="1395356119"/>
+      </p:ext>
+    </p:extLst>
+  </p:cSld>
+  <p:clrMapOvr>
+    <a:masterClrMapping/>
+  </p:clrMapOvr>
+</p:sld>
+</file>
+
+<file path=ppt/slides/slide9.xml><?xml version="1.0" encoding="utf-8"?>
+<p:sld xmlns:a="http://schemas.openxmlformats.org/drawingml/2006/main" xmlns:r="http://schemas.openxmlformats.org/officeDocument/2006/relationships" xmlns:p="http://schemas.openxmlformats.org/presentationml/2006/main">
+  <p:cSld>
+    <p:spTree>
+      <p:nvGrpSpPr>
+        <p:cNvPr id="1" name=""/>
+        <p:cNvGrpSpPr/>
+        <p:nvPr/>
+      </p:nvGrpSpPr>
+      <p:grpSpPr>
+        <a:xfrm>
+          <a:off x="0" y="0"/>
+          <a:ext cx="0" cy="0"/>
+          <a:chOff x="0" y="0"/>
+          <a:chExt cx="0" cy="0"/>
+        </a:xfrm>
+      </p:grpSpPr>
+      <p:sp>
+        <p:nvSpPr>
+          <p:cNvPr id="2" name="タイトル 1">
+            <a:extLst>
+              <a:ext uri="{FF2B5EF4-FFF2-40B4-BE49-F238E27FC236}">
+                <a16:creationId xmlns:a16="http://schemas.microsoft.com/office/drawing/2014/main" id="{DEB6D72E-669F-41E1-84C2-19FB59C30903}"/>
+              </a:ext>
+            </a:extLst>
+          </p:cNvPr>
+          <p:cNvSpPr>
+            <a:spLocks noGrp="1"/>
+          </p:cNvSpPr>
+          <p:nvPr>
+            <p:ph type="title"/>
+          </p:nvPr>
+        </p:nvSpPr>
+        <p:spPr>
+          <a:xfrm>
+            <a:off x="495299" y="980728"/>
+            <a:ext cx="8915400" cy="1143000"/>
+          </a:xfrm>
+        </p:spPr>
+        <p:txBody>
+          <a:bodyPr>
+            <a:normAutofit/>
+          </a:bodyPr>
+          <a:lstStyle/>
+          <a:p>
+            <a:r>
+              <a:rPr kumimoji="1" lang="ja-JP" altLang="en-US" sz="2000" dirty="0"/>
+              <a:t>敵の移動</a:t>
+            </a:r>
+            <a:r>
+              <a:rPr lang="ja-JP" altLang="en-US" sz="2000" dirty="0"/>
+              <a:t>は</a:t>
+            </a:r>
+            <a:r>
+              <a:rPr lang="en-US" altLang="ja-JP" sz="2000" dirty="0" err="1"/>
+              <a:t>Navmesh</a:t>
+            </a:r>
+            <a:r>
+              <a:rPr lang="ja-JP" altLang="en-US" sz="2000" dirty="0"/>
+              <a:t>を使い最短距離を出し、エリア内を歩き周り、プレイヤーまでの距離で足音などが変化するようにしている。ついでに敵を状態遷移ごとににスピードや動きなどを変えたりしている。</a:t>
+            </a:r>
+            <a:endParaRPr kumimoji="1" lang="ja-JP" altLang="en-US" sz="2000" dirty="0"/>
+          </a:p>
+        </p:txBody>
+      </p:sp>
+      <p:pic>
+        <p:nvPicPr>
+          <p:cNvPr id="9" name="コンテンツ プレースホルダー 8">
+            <a:extLst>
+              <a:ext uri="{FF2B5EF4-FFF2-40B4-BE49-F238E27FC236}">
+                <a16:creationId xmlns:a16="http://schemas.microsoft.com/office/drawing/2014/main" id="{B9D7BB10-B6EC-4EA5-A2F5-9A0E6DF944D5}"/>
+              </a:ext>
+            </a:extLst>
+          </p:cNvPr>
+          <p:cNvPicPr>
+            <a:picLocks noGrp="1" noChangeAspect="1"/>
+          </p:cNvPicPr>
+          <p:nvPr>
+            <p:ph idx="1"/>
+          </p:nvPr>
+        </p:nvPicPr>
+        <p:blipFill>
+          <a:blip r:embed="rId2">
+            <a:extLst>
+              <a:ext uri="{28A0092B-C50C-407E-A947-70E740481C1C}">
+                <a14:useLocalDpi xmlns:a14="http://schemas.microsoft.com/office/drawing/2010/main" val="0"/>
+              </a:ext>
+            </a:extLst>
+          </a:blip>
+          <a:stretch>
+            <a:fillRect/>
+          </a:stretch>
+        </p:blipFill>
+        <p:spPr>
+          <a:xfrm>
+            <a:off x="892945" y="2204864"/>
+            <a:ext cx="8120109" cy="4525963"/>
+          </a:xfrm>
+          <a:prstGeom prst="rect">
+            <a:avLst/>
+          </a:prstGeom>
+          <a:solidFill>
+            <a:srgbClr val="FFFFFF">
+              <a:shade val="85000"/>
+            </a:srgbClr>
+          </a:solidFill>
+          <a:ln w="88900" cap="sq">
+            <a:solidFill>
+              <a:srgbClr val="FFFFFF"/>
+            </a:solidFill>
+            <a:miter lim="800000"/>
+          </a:ln>
+          <a:effectLst>
+            <a:outerShdw blurRad="55000" dist="18000" dir="5400000" algn="tl" rotWithShape="0">
+              <a:srgbClr val="000000">
+                <a:alpha val="40000"/>
+              </a:srgbClr>
+            </a:outerShdw>
+          </a:effectLst>
+          <a:scene3d>
+            <a:camera prst="orthographicFront"/>
+            <a:lightRig rig="twoPt" dir="t">
+              <a:rot lat="0" lon="0" rev="7200000"/>
+            </a:lightRig>
+          </a:scene3d>
+          <a:sp3d>
+            <a:bevelT w="25400" h="19050"/>
+            <a:contourClr>
+              <a:srgbClr val="FFFFFF"/>
+            </a:contourClr>
+          </a:sp3d>
+        </p:spPr>
+      </p:pic>
+      <p:sp>
+        <p:nvSpPr>
+          <p:cNvPr id="4" name="テキスト ボックス 3">
+            <a:extLst>
+              <a:ext uri="{FF2B5EF4-FFF2-40B4-BE49-F238E27FC236}">
+                <a16:creationId xmlns:a16="http://schemas.microsoft.com/office/drawing/2014/main" id="{BE923453-90EA-441A-843B-440B2D80C8EC}"/>
+              </a:ext>
+            </a:extLst>
+          </p:cNvPr>
+          <p:cNvSpPr txBox="1"/>
+          <p:nvPr/>
+        </p:nvSpPr>
+        <p:spPr>
+          <a:xfrm>
+            <a:off x="416496" y="298827"/>
+            <a:ext cx="3005951" cy="769441"/>
+          </a:xfrm>
+          <a:prstGeom prst="rect">
+            <a:avLst/>
+          </a:prstGeom>
+          <a:noFill/>
+        </p:spPr>
+        <p:txBody>
+          <a:bodyPr wrap="none" rtlCol="0">
+            <a:spAutoFit/>
+          </a:bodyPr>
+          <a:lstStyle/>
+          <a:p>
+            <a:r>
+              <a:rPr kumimoji="1" lang="ja-JP" altLang="en-US" sz="4400" b="1" dirty="0"/>
+              <a:t>技術紹介②</a:t>
+            </a:r>
+          </a:p>
+        </p:txBody>
+      </p:sp>
+    </p:spTree>
+    <p:extLst>
+      <p:ext uri="{BB962C8B-B14F-4D97-AF65-F5344CB8AC3E}">
+        <p14:creationId xmlns:p14="http://schemas.microsoft.com/office/powerpoint/2010/main" val="781179589"/>
       </p:ext>
     </p:extLst>
   </p:cSld>

--- a/ポートフォリオ.pptx
+++ b/ポートフォリオ.pptx
@@ -13,14 +13,14 @@
   <p:sldIdLst>
     <p:sldId id="259" r:id="rId2"/>
     <p:sldId id="265" r:id="rId3"/>
-    <p:sldId id="267" r:id="rId4"/>
-    <p:sldId id="268" r:id="rId5"/>
-    <p:sldId id="266" r:id="rId6"/>
-    <p:sldId id="257" r:id="rId7"/>
-    <p:sldId id="263" r:id="rId8"/>
-    <p:sldId id="258" r:id="rId9"/>
-    <p:sldId id="260" r:id="rId10"/>
-    <p:sldId id="261" r:id="rId11"/>
+    <p:sldId id="266" r:id="rId4"/>
+    <p:sldId id="257" r:id="rId5"/>
+    <p:sldId id="263" r:id="rId6"/>
+    <p:sldId id="258" r:id="rId7"/>
+    <p:sldId id="260" r:id="rId8"/>
+    <p:sldId id="261" r:id="rId9"/>
+    <p:sldId id="267" r:id="rId10"/>
+    <p:sldId id="268" r:id="rId11"/>
     <p:sldId id="264" r:id="rId12"/>
   </p:sldIdLst>
   <p:sldSz cx="9906000" cy="6858000" type="A4"/>
@@ -236,7 +236,7 @@
           <a:p>
             <a:fld id="{DE2EB211-95CE-4465-AE82-71FC1BD57B75}" type="datetimeFigureOut">
               <a:rPr kumimoji="1" lang="ja-JP" altLang="en-US" smtClean="0"/>
-              <a:t>2025/10/6</a:t>
+              <a:t>2025/10/10</a:t>
             </a:fld>
             <a:endParaRPr kumimoji="1" lang="ja-JP" altLang="en-US"/>
           </a:p>
@@ -413,7 +413,7 @@
           <a:p>
             <a:fld id="{4955FFDA-CD2B-48C3-9523-160A6827052C}" type="datetimeFigureOut">
               <a:rPr kumimoji="1" lang="ja-JP" altLang="en-US" smtClean="0"/>
-              <a:t>2025/10/6</a:t>
+              <a:t>2025/10/10</a:t>
             </a:fld>
             <a:endParaRPr kumimoji="1" lang="ja-JP" altLang="en-US"/>
           </a:p>
@@ -782,7 +782,7 @@
           <a:p>
             <a:fld id="{4E0F9C1C-2F35-4495-ABDD-C1C7C22641EE}" type="slidenum">
               <a:rPr kumimoji="1" lang="ja-JP" altLang="en-US" smtClean="0"/>
-              <a:t>6</a:t>
+              <a:t>4</a:t>
             </a:fld>
             <a:endParaRPr kumimoji="1" lang="ja-JP" altLang="en-US"/>
           </a:p>
@@ -866,7 +866,7 @@
           <a:p>
             <a:fld id="{4E0F9C1C-2F35-4495-ABDD-C1C7C22641EE}" type="slidenum">
               <a:rPr kumimoji="1" lang="ja-JP" altLang="en-US" smtClean="0"/>
-              <a:t>7</a:t>
+              <a:t>5</a:t>
             </a:fld>
             <a:endParaRPr kumimoji="1" lang="ja-JP" altLang="en-US"/>
           </a:p>
@@ -1064,7 +1064,7 @@
           <a:p>
             <a:fld id="{1A82EE06-D961-426C-A9FF-E6B541017B60}" type="datetimeFigureOut">
               <a:rPr kumimoji="1" lang="ja-JP" altLang="en-US" smtClean="0"/>
-              <a:t>2025/10/6</a:t>
+              <a:t>2025/10/10</a:t>
             </a:fld>
             <a:endParaRPr kumimoji="1" lang="ja-JP" altLang="en-US"/>
           </a:p>
@@ -1264,7 +1264,7 @@
           <a:p>
             <a:fld id="{1A82EE06-D961-426C-A9FF-E6B541017B60}" type="datetimeFigureOut">
               <a:rPr kumimoji="1" lang="ja-JP" altLang="en-US" smtClean="0"/>
-              <a:t>2025/10/6</a:t>
+              <a:t>2025/10/10</a:t>
             </a:fld>
             <a:endParaRPr kumimoji="1" lang="ja-JP" altLang="en-US"/>
           </a:p>
@@ -1474,7 +1474,7 @@
           <a:p>
             <a:fld id="{1A82EE06-D961-426C-A9FF-E6B541017B60}" type="datetimeFigureOut">
               <a:rPr kumimoji="1" lang="ja-JP" altLang="en-US" smtClean="0"/>
-              <a:t>2025/10/6</a:t>
+              <a:t>2025/10/10</a:t>
             </a:fld>
             <a:endParaRPr kumimoji="1" lang="ja-JP" altLang="en-US"/>
           </a:p>
@@ -1674,7 +1674,7 @@
           <a:p>
             <a:fld id="{1A82EE06-D961-426C-A9FF-E6B541017B60}" type="datetimeFigureOut">
               <a:rPr kumimoji="1" lang="ja-JP" altLang="en-US" smtClean="0"/>
-              <a:t>2025/10/6</a:t>
+              <a:t>2025/10/10</a:t>
             </a:fld>
             <a:endParaRPr kumimoji="1" lang="ja-JP" altLang="en-US"/>
           </a:p>
@@ -1919,7 +1919,7 @@
           <a:p>
             <a:fld id="{1A82EE06-D961-426C-A9FF-E6B541017B60}" type="datetimeFigureOut">
               <a:rPr kumimoji="1" lang="ja-JP" altLang="en-US" smtClean="0"/>
-              <a:t>2025/10/6</a:t>
+              <a:t>2025/10/10</a:t>
             </a:fld>
             <a:endParaRPr kumimoji="1" lang="ja-JP" altLang="en-US"/>
           </a:p>
@@ -2268,7 +2268,7 @@
           <a:p>
             <a:fld id="{1A82EE06-D961-426C-A9FF-E6B541017B60}" type="datetimeFigureOut">
               <a:rPr kumimoji="1" lang="ja-JP" altLang="en-US" smtClean="0"/>
-              <a:t>2025/10/6</a:t>
+              <a:t>2025/10/10</a:t>
             </a:fld>
             <a:endParaRPr kumimoji="1" lang="ja-JP" altLang="en-US"/>
           </a:p>
@@ -2751,7 +2751,7 @@
           <a:p>
             <a:fld id="{1A82EE06-D961-426C-A9FF-E6B541017B60}" type="datetimeFigureOut">
               <a:rPr kumimoji="1" lang="ja-JP" altLang="en-US" smtClean="0"/>
-              <a:t>2025/10/6</a:t>
+              <a:t>2025/10/10</a:t>
             </a:fld>
             <a:endParaRPr kumimoji="1" lang="ja-JP" altLang="en-US"/>
           </a:p>
@@ -2868,7 +2868,7 @@
           <a:p>
             <a:fld id="{1A82EE06-D961-426C-A9FF-E6B541017B60}" type="datetimeFigureOut">
               <a:rPr kumimoji="1" lang="ja-JP" altLang="en-US" smtClean="0"/>
-              <a:t>2025/10/6</a:t>
+              <a:t>2025/10/10</a:t>
             </a:fld>
             <a:endParaRPr kumimoji="1" lang="ja-JP" altLang="en-US"/>
           </a:p>
@@ -2963,7 +2963,7 @@
           <a:p>
             <a:fld id="{1A82EE06-D961-426C-A9FF-E6B541017B60}" type="datetimeFigureOut">
               <a:rPr kumimoji="1" lang="ja-JP" altLang="en-US" smtClean="0"/>
-              <a:t>2025/10/6</a:t>
+              <a:t>2025/10/10</a:t>
             </a:fld>
             <a:endParaRPr kumimoji="1" lang="ja-JP" altLang="en-US"/>
           </a:p>
@@ -3270,7 +3270,7 @@
           <a:p>
             <a:fld id="{1A82EE06-D961-426C-A9FF-E6B541017B60}" type="datetimeFigureOut">
               <a:rPr kumimoji="1" lang="ja-JP" altLang="en-US" smtClean="0"/>
-              <a:t>2025/10/6</a:t>
+              <a:t>2025/10/10</a:t>
             </a:fld>
             <a:endParaRPr kumimoji="1" lang="ja-JP" altLang="en-US"/>
           </a:p>
@@ -3522,7 +3522,7 @@
           <a:p>
             <a:fld id="{1A82EE06-D961-426C-A9FF-E6B541017B60}" type="datetimeFigureOut">
               <a:rPr kumimoji="1" lang="ja-JP" altLang="en-US" smtClean="0"/>
-              <a:t>2025/10/6</a:t>
+              <a:t>2025/10/10</a:t>
             </a:fld>
             <a:endParaRPr kumimoji="1" lang="ja-JP" altLang="en-US"/>
           </a:p>
@@ -3774,7 +3774,7 @@
           <a:p>
             <a:fld id="{1A82EE06-D961-426C-A9FF-E6B541017B60}" type="datetimeFigureOut">
               <a:rPr kumimoji="1" lang="ja-JP" altLang="en-US" smtClean="0"/>
-              <a:t>2025/10/6</a:t>
+              <a:t>2025/10/10</a:t>
             </a:fld>
             <a:endParaRPr kumimoji="1" lang="ja-JP" altLang="en-US"/>
           </a:p>
@@ -4167,7 +4167,7 @@
         </p:nvSpPr>
         <p:spPr>
           <a:xfrm>
-            <a:off x="128464" y="274638"/>
+            <a:off x="200472" y="-18256"/>
             <a:ext cx="9282236" cy="1143000"/>
           </a:xfrm>
         </p:spPr>
@@ -4434,7 +4434,7 @@
           <p:cNvPr id="2" name="タイトル 1">
             <a:extLst>
               <a:ext uri="{FF2B5EF4-FFF2-40B4-BE49-F238E27FC236}">
-                <a16:creationId xmlns:a16="http://schemas.microsoft.com/office/drawing/2014/main" id="{C543B4AE-CDF1-475B-A0C7-C4282CF03024}"/>
+                <a16:creationId xmlns:a16="http://schemas.microsoft.com/office/drawing/2014/main" id="{FBA80AB6-3E3E-46D4-BC57-09F0F9F76E14}"/>
               </a:ext>
             </a:extLst>
           </p:cNvPr>
@@ -4447,30 +4447,29 @@
         </p:nvSpPr>
         <p:spPr>
           <a:xfrm>
-            <a:off x="704528" y="1700808"/>
-            <a:ext cx="8915400" cy="1138138"/>
+            <a:off x="-303584" y="1052736"/>
+            <a:ext cx="10009112" cy="1143000"/>
           </a:xfrm>
         </p:spPr>
         <p:txBody>
           <a:bodyPr>
-            <a:normAutofit/>
+            <a:normAutofit fontScale="90000"/>
           </a:bodyPr>
           <a:lstStyle/>
           <a:p>
             <a:r>
-              <a:rPr lang="ja-JP" altLang="en-US" sz="2000" dirty="0"/>
-              <a:t>コントローラーのインスタンスを作りシーンが遷移されてもそのコントローラーに割り当てたインプットシステムを持ってきている。</a:t>
-            </a:r>
-            <a:endParaRPr kumimoji="1" lang="ja-JP" altLang="en-US" sz="2000" dirty="0"/>
+              <a:rPr kumimoji="1" lang="ja-JP" altLang="en-US" dirty="0"/>
+              <a:t>・時間いっぱいまでジャンプで敵から避けるゲームとなっております</a:t>
+            </a:r>
           </a:p>
         </p:txBody>
       </p:sp>
       <p:pic>
         <p:nvPicPr>
-          <p:cNvPr id="5" name="コンテンツ プレースホルダー 4">
+          <p:cNvPr id="13" name="コンテンツ プレースホルダー 12">
             <a:extLst>
               <a:ext uri="{FF2B5EF4-FFF2-40B4-BE49-F238E27FC236}">
-                <a16:creationId xmlns:a16="http://schemas.microsoft.com/office/drawing/2014/main" id="{A8050D1F-85C2-4C53-9257-7EED9E913437}"/>
+                <a16:creationId xmlns:a16="http://schemas.microsoft.com/office/drawing/2014/main" id="{5E524F45-1087-42F3-8942-94646D0C9C12}"/>
               </a:ext>
             </a:extLst>
           </p:cNvPr>
@@ -4495,50 +4494,15 @@
         </p:blipFill>
         <p:spPr>
           <a:xfrm>
-            <a:off x="2072680" y="3573016"/>
-            <a:ext cx="5877745" cy="2581635"/>
+            <a:off x="5385048" y="2852936"/>
+            <a:ext cx="4122784" cy="3066321"/>
           </a:xfrm>
         </p:spPr>
       </p:pic>
-      <p:sp>
-        <p:nvSpPr>
-          <p:cNvPr id="4" name="テキスト ボックス 3">
-            <a:extLst>
-              <a:ext uri="{FF2B5EF4-FFF2-40B4-BE49-F238E27FC236}">
-                <a16:creationId xmlns:a16="http://schemas.microsoft.com/office/drawing/2014/main" id="{89E7C050-CFCF-4342-A9C4-C08F7C277C68}"/>
-              </a:ext>
-            </a:extLst>
-          </p:cNvPr>
-          <p:cNvSpPr txBox="1"/>
-          <p:nvPr/>
-        </p:nvSpPr>
-        <p:spPr>
-          <a:xfrm>
-            <a:off x="416496" y="298827"/>
-            <a:ext cx="3005951" cy="769441"/>
-          </a:xfrm>
-          <a:prstGeom prst="rect">
-            <a:avLst/>
-          </a:prstGeom>
-          <a:noFill/>
-        </p:spPr>
-        <p:txBody>
-          <a:bodyPr wrap="none" rtlCol="0">
-            <a:spAutoFit/>
-          </a:bodyPr>
-          <a:lstStyle/>
-          <a:p>
-            <a:r>
-              <a:rPr kumimoji="1" lang="ja-JP" altLang="en-US" sz="4400" b="1" dirty="0"/>
-              <a:t>技術紹介③</a:t>
-            </a:r>
-          </a:p>
-        </p:txBody>
-      </p:sp>
     </p:spTree>
     <p:extLst>
       <p:ext uri="{BB962C8B-B14F-4D97-AF65-F5344CB8AC3E}">
-        <p14:creationId xmlns:p14="http://schemas.microsoft.com/office/powerpoint/2010/main" val="4218240706"/>
+        <p14:creationId xmlns:p14="http://schemas.microsoft.com/office/powerpoint/2010/main" val="3331665831"/>
       </p:ext>
     </p:extLst>
   </p:cSld>
@@ -4872,276 +4836,6 @@
       </p:grpSpPr>
       <p:sp>
         <p:nvSpPr>
-          <p:cNvPr id="2" name="タイトル 1">
-            <a:extLst>
-              <a:ext uri="{FF2B5EF4-FFF2-40B4-BE49-F238E27FC236}">
-                <a16:creationId xmlns:a16="http://schemas.microsoft.com/office/drawing/2014/main" id="{224A73DE-33EE-4915-8BC1-BEADD356235B}"/>
-              </a:ext>
-            </a:extLst>
-          </p:cNvPr>
-          <p:cNvSpPr>
-            <a:spLocks noGrp="1"/>
-          </p:cNvSpPr>
-          <p:nvPr>
-            <p:ph type="title"/>
-          </p:nvPr>
-        </p:nvSpPr>
-        <p:spPr/>
-        <p:txBody>
-          <a:bodyPr/>
-          <a:lstStyle/>
-          <a:p>
-            <a:pPr algn="l"/>
-            <a:r>
-              <a:rPr lang="ja-JP" altLang="en-US" dirty="0"/>
-              <a:t>制作作品</a:t>
-            </a:r>
-            <a:r>
-              <a:rPr lang="en-US" altLang="ja-JP" dirty="0"/>
-              <a:t>   </a:t>
-            </a:r>
-            <a:endParaRPr kumimoji="1" lang="ja-JP" altLang="en-US" dirty="0"/>
-          </a:p>
-        </p:txBody>
-      </p:sp>
-      <p:sp>
-        <p:nvSpPr>
-          <p:cNvPr id="3" name="コンテンツ プレースホルダー 2">
-            <a:extLst>
-              <a:ext uri="{FF2B5EF4-FFF2-40B4-BE49-F238E27FC236}">
-                <a16:creationId xmlns:a16="http://schemas.microsoft.com/office/drawing/2014/main" id="{2BA5DA61-0B78-4574-85D0-7FB4DDAEEC15}"/>
-              </a:ext>
-            </a:extLst>
-          </p:cNvPr>
-          <p:cNvSpPr>
-            <a:spLocks noGrp="1"/>
-          </p:cNvSpPr>
-          <p:nvPr>
-            <p:ph idx="1"/>
-          </p:nvPr>
-        </p:nvSpPr>
-        <p:spPr>
-          <a:xfrm>
-            <a:off x="20171" y="1628800"/>
-            <a:ext cx="8915400" cy="4525963"/>
-          </a:xfrm>
-        </p:spPr>
-        <p:txBody>
-          <a:bodyPr/>
-          <a:lstStyle/>
-          <a:p>
-            <a:r>
-              <a:rPr lang="en-US" altLang="ja-JP" dirty="0">
-                <a:solidFill>
-                  <a:schemeClr val="bg1"/>
-                </a:solidFill>
-              </a:rPr>
-              <a:t>Cockroach</a:t>
-            </a:r>
-          </a:p>
-          <a:p>
-            <a:r>
-              <a:rPr lang="ja-JP" altLang="en-US" dirty="0">
-                <a:solidFill>
-                  <a:schemeClr val="bg1"/>
-                </a:solidFill>
-              </a:rPr>
-              <a:t>言語　</a:t>
-            </a:r>
-            <a:r>
-              <a:rPr lang="en-US" altLang="ja-JP" dirty="0">
-                <a:solidFill>
-                  <a:schemeClr val="bg1"/>
-                </a:solidFill>
-              </a:rPr>
-              <a:t>C++</a:t>
-            </a:r>
-          </a:p>
-          <a:p>
-            <a:r>
-              <a:rPr lang="ja-JP" altLang="en-US" dirty="0">
-                <a:solidFill>
-                  <a:schemeClr val="bg1"/>
-                </a:solidFill>
-              </a:rPr>
-              <a:t>本格的なゲーム作成として行った最初の製作作品です。</a:t>
-            </a:r>
-            <a:endParaRPr lang="en-US" altLang="ja-JP" dirty="0">
-              <a:solidFill>
-                <a:schemeClr val="bg1"/>
-              </a:solidFill>
-            </a:endParaRPr>
-          </a:p>
-        </p:txBody>
-      </p:sp>
-      <p:pic>
-        <p:nvPicPr>
-          <p:cNvPr id="5" name="図 4">
-            <a:extLst>
-              <a:ext uri="{FF2B5EF4-FFF2-40B4-BE49-F238E27FC236}">
-                <a16:creationId xmlns:a16="http://schemas.microsoft.com/office/drawing/2014/main" id="{6F9195E3-4D03-40EF-8354-F294B66092FB}"/>
-              </a:ext>
-            </a:extLst>
-          </p:cNvPr>
-          <p:cNvPicPr>
-            <a:picLocks noChangeAspect="1"/>
-          </p:cNvPicPr>
-          <p:nvPr/>
-        </p:nvPicPr>
-        <p:blipFill>
-          <a:blip r:embed="rId2">
-            <a:extLst>
-              <a:ext uri="{28A0092B-C50C-407E-A947-70E740481C1C}">
-                <a14:useLocalDpi xmlns:a14="http://schemas.microsoft.com/office/drawing/2010/main" val="0"/>
-              </a:ext>
-            </a:extLst>
-          </a:blip>
-          <a:stretch>
-            <a:fillRect/>
-          </a:stretch>
-        </p:blipFill>
-        <p:spPr>
-          <a:xfrm>
-            <a:off x="4468371" y="3429000"/>
-            <a:ext cx="4464496" cy="3000342"/>
-          </a:xfrm>
-          <a:prstGeom prst="rect">
-            <a:avLst/>
-          </a:prstGeom>
-        </p:spPr>
-      </p:pic>
-    </p:spTree>
-    <p:extLst>
-      <p:ext uri="{BB962C8B-B14F-4D97-AF65-F5344CB8AC3E}">
-        <p14:creationId xmlns:p14="http://schemas.microsoft.com/office/powerpoint/2010/main" val="3439998654"/>
-      </p:ext>
-    </p:extLst>
-  </p:cSld>
-  <p:clrMapOvr>
-    <a:masterClrMapping/>
-  </p:clrMapOvr>
-</p:sld>
-</file>
-
-<file path=ppt/slides/slide4.xml><?xml version="1.0" encoding="utf-8"?>
-<p:sld xmlns:a="http://schemas.openxmlformats.org/drawingml/2006/main" xmlns:r="http://schemas.openxmlformats.org/officeDocument/2006/relationships" xmlns:p="http://schemas.openxmlformats.org/presentationml/2006/main">
-  <p:cSld>
-    <p:spTree>
-      <p:nvGrpSpPr>
-        <p:cNvPr id="1" name=""/>
-        <p:cNvGrpSpPr/>
-        <p:nvPr/>
-      </p:nvGrpSpPr>
-      <p:grpSpPr>
-        <a:xfrm>
-          <a:off x="0" y="0"/>
-          <a:ext cx="0" cy="0"/>
-          <a:chOff x="0" y="0"/>
-          <a:chExt cx="0" cy="0"/>
-        </a:xfrm>
-      </p:grpSpPr>
-      <p:sp>
-        <p:nvSpPr>
-          <p:cNvPr id="2" name="タイトル 1">
-            <a:extLst>
-              <a:ext uri="{FF2B5EF4-FFF2-40B4-BE49-F238E27FC236}">
-                <a16:creationId xmlns:a16="http://schemas.microsoft.com/office/drawing/2014/main" id="{FBA80AB6-3E3E-46D4-BC57-09F0F9F76E14}"/>
-              </a:ext>
-            </a:extLst>
-          </p:cNvPr>
-          <p:cNvSpPr>
-            <a:spLocks noGrp="1"/>
-          </p:cNvSpPr>
-          <p:nvPr>
-            <p:ph type="title"/>
-          </p:nvPr>
-        </p:nvSpPr>
-        <p:spPr>
-          <a:xfrm>
-            <a:off x="-303584" y="1052736"/>
-            <a:ext cx="10009112" cy="1143000"/>
-          </a:xfrm>
-        </p:spPr>
-        <p:txBody>
-          <a:bodyPr>
-            <a:normAutofit fontScale="90000"/>
-          </a:bodyPr>
-          <a:lstStyle/>
-          <a:p>
-            <a:r>
-              <a:rPr kumimoji="1" lang="ja-JP" altLang="en-US" dirty="0"/>
-              <a:t>・時間いっぱいまでジャンプで敵から避けるゲーム</a:t>
-            </a:r>
-          </a:p>
-        </p:txBody>
-      </p:sp>
-      <p:pic>
-        <p:nvPicPr>
-          <p:cNvPr id="13" name="コンテンツ プレースホルダー 12">
-            <a:extLst>
-              <a:ext uri="{FF2B5EF4-FFF2-40B4-BE49-F238E27FC236}">
-                <a16:creationId xmlns:a16="http://schemas.microsoft.com/office/drawing/2014/main" id="{5E524F45-1087-42F3-8942-94646D0C9C12}"/>
-              </a:ext>
-            </a:extLst>
-          </p:cNvPr>
-          <p:cNvPicPr>
-            <a:picLocks noGrp="1" noChangeAspect="1"/>
-          </p:cNvPicPr>
-          <p:nvPr>
-            <p:ph idx="1"/>
-          </p:nvPr>
-        </p:nvPicPr>
-        <p:blipFill>
-          <a:blip r:embed="rId2">
-            <a:extLst>
-              <a:ext uri="{28A0092B-C50C-407E-A947-70E740481C1C}">
-                <a14:useLocalDpi xmlns:a14="http://schemas.microsoft.com/office/drawing/2010/main" val="0"/>
-              </a:ext>
-            </a:extLst>
-          </a:blip>
-          <a:stretch>
-            <a:fillRect/>
-          </a:stretch>
-        </p:blipFill>
-        <p:spPr>
-          <a:xfrm>
-            <a:off x="5385048" y="2852936"/>
-            <a:ext cx="4122784" cy="3066321"/>
-          </a:xfrm>
-        </p:spPr>
-      </p:pic>
-    </p:spTree>
-    <p:extLst>
-      <p:ext uri="{BB962C8B-B14F-4D97-AF65-F5344CB8AC3E}">
-        <p14:creationId xmlns:p14="http://schemas.microsoft.com/office/powerpoint/2010/main" val="3331665831"/>
-      </p:ext>
-    </p:extLst>
-  </p:cSld>
-  <p:clrMapOvr>
-    <a:masterClrMapping/>
-  </p:clrMapOvr>
-</p:sld>
-</file>
-
-<file path=ppt/slides/slide5.xml><?xml version="1.0" encoding="utf-8"?>
-<p:sld xmlns:a="http://schemas.openxmlformats.org/drawingml/2006/main" xmlns:r="http://schemas.openxmlformats.org/officeDocument/2006/relationships" xmlns:p="http://schemas.openxmlformats.org/presentationml/2006/main">
-  <p:cSld>
-    <p:spTree>
-      <p:nvGrpSpPr>
-        <p:cNvPr id="1" name=""/>
-        <p:cNvGrpSpPr/>
-        <p:nvPr/>
-      </p:nvGrpSpPr>
-      <p:grpSpPr>
-        <a:xfrm>
-          <a:off x="0" y="0"/>
-          <a:ext cx="0" cy="0"/>
-          <a:chOff x="0" y="0"/>
-          <a:chExt cx="0" cy="0"/>
-        </a:xfrm>
-      </p:grpSpPr>
-      <p:sp>
-        <p:nvSpPr>
           <p:cNvPr id="4" name="タイトル 1">
             <a:extLst>
               <a:ext uri="{FF2B5EF4-FFF2-40B4-BE49-F238E27FC236}">
@@ -5203,7 +4897,7 @@
         </p:blipFill>
         <p:spPr>
           <a:xfrm>
-            <a:off x="3822517" y="2132856"/>
+            <a:off x="3989138" y="1850921"/>
             <a:ext cx="5916862" cy="3156157"/>
           </a:xfrm>
           <a:prstGeom prst="rect">
@@ -5225,8 +4919,8 @@
         </p:nvSpPr>
         <p:spPr>
           <a:xfrm>
-            <a:off x="344488" y="1700808"/>
-            <a:ext cx="3024336" cy="369332"/>
+            <a:off x="272480" y="1732895"/>
+            <a:ext cx="3384376" cy="523220"/>
           </a:xfrm>
           <a:prstGeom prst="rect">
             <a:avLst/>
@@ -5244,10 +4938,128 @@
               <a:t>・</a:t>
             </a:r>
             <a:r>
+              <a:rPr lang="en-US" altLang="ja-JP" sz="2800" dirty="0"/>
+              <a:t>LEVIATHAN</a:t>
+            </a:r>
+            <a:endParaRPr kumimoji="1" lang="ja-JP" altLang="en-US" sz="2800" dirty="0"/>
+          </a:p>
+        </p:txBody>
+      </p:sp>
+      <p:sp>
+        <p:nvSpPr>
+          <p:cNvPr id="6" name="テキスト ボックス 5">
+            <a:extLst>
+              <a:ext uri="{FF2B5EF4-FFF2-40B4-BE49-F238E27FC236}">
+                <a16:creationId xmlns:a16="http://schemas.microsoft.com/office/drawing/2014/main" id="{D491D923-44CE-46F7-9601-1642CBD6B74C}"/>
+              </a:ext>
+            </a:extLst>
+          </p:cNvPr>
+          <p:cNvSpPr txBox="1"/>
+          <p:nvPr/>
+        </p:nvSpPr>
+        <p:spPr>
+          <a:xfrm>
+            <a:off x="56456" y="2793831"/>
+            <a:ext cx="3888432" cy="2308324"/>
+          </a:xfrm>
+          <a:prstGeom prst="rect">
+            <a:avLst/>
+          </a:prstGeom>
+          <a:noFill/>
+        </p:spPr>
+        <p:txBody>
+          <a:bodyPr wrap="square" rtlCol="0">
+            <a:spAutoFit/>
+          </a:bodyPr>
+          <a:lstStyle/>
+          <a:p>
+            <a:r>
+              <a:rPr kumimoji="1" lang="ja-JP" altLang="en-US" dirty="0"/>
+              <a:t>ジャンル　ホラーゲーム</a:t>
+            </a:r>
+            <a:endParaRPr kumimoji="1" lang="en-US" altLang="ja-JP" dirty="0"/>
+          </a:p>
+          <a:p>
+            <a:r>
+              <a:rPr kumimoji="1" lang="ja-JP" altLang="en-US" dirty="0"/>
+              <a:t>開発環境　</a:t>
+            </a:r>
+            <a:r>
+              <a:rPr kumimoji="1" lang="en-US" altLang="ja-JP" dirty="0"/>
+              <a:t>Unity </a:t>
+            </a:r>
+            <a:r>
               <a:rPr lang="en-US" altLang="ja-JP" dirty="0"/>
-              <a:t>LEVIATHAN</a:t>
-            </a:r>
-            <a:endParaRPr kumimoji="1" lang="ja-JP" altLang="en-US" dirty="0"/>
+              <a:t>/C#</a:t>
+            </a:r>
+            <a:br>
+              <a:rPr lang="en-US" altLang="ja-JP" dirty="0"/>
+            </a:br>
+            <a:r>
+              <a:rPr lang="ja-JP" altLang="en-US" dirty="0"/>
+              <a:t>対応機種　</a:t>
+            </a:r>
+            <a:r>
+              <a:rPr lang="en-US" altLang="ja-JP" dirty="0"/>
+              <a:t>PC</a:t>
+            </a:r>
+            <a:br>
+              <a:rPr lang="en-US" altLang="ja-JP" dirty="0"/>
+            </a:br>
+            <a:r>
+              <a:rPr lang="ja-JP" altLang="en-US" dirty="0"/>
+              <a:t>制作期間　</a:t>
+            </a:r>
+            <a:r>
+              <a:rPr lang="en-US" altLang="ja-JP" dirty="0"/>
+              <a:t>6</a:t>
+            </a:r>
+            <a:r>
+              <a:rPr lang="ja-JP" altLang="en-US" dirty="0"/>
+              <a:t>カ月</a:t>
+            </a:r>
+            <a:br>
+              <a:rPr lang="en-US" altLang="ja-JP" dirty="0"/>
+            </a:br>
+            <a:r>
+              <a:rPr lang="ja-JP" altLang="en-US" dirty="0"/>
+              <a:t>制作時期　</a:t>
+            </a:r>
+            <a:r>
+              <a:rPr lang="en-US" altLang="ja-JP" dirty="0"/>
+              <a:t>2024</a:t>
+            </a:r>
+            <a:r>
+              <a:rPr lang="ja-JP" altLang="en-US" dirty="0"/>
+              <a:t>年</a:t>
+            </a:r>
+            <a:r>
+              <a:rPr lang="en-US" altLang="ja-JP" dirty="0"/>
+              <a:t>10</a:t>
+            </a:r>
+            <a:r>
+              <a:rPr lang="ja-JP" altLang="en-US" dirty="0"/>
+              <a:t>月</a:t>
+            </a:r>
+            <a:r>
+              <a:rPr lang="en-US" altLang="ja-JP" dirty="0"/>
+              <a:t>~</a:t>
+            </a:r>
+            <a:br>
+              <a:rPr lang="en-US" altLang="ja-JP" dirty="0"/>
+            </a:br>
+            <a:r>
+              <a:rPr lang="ja-JP" altLang="en-US" dirty="0"/>
+              <a:t>制作人数　一人</a:t>
+            </a:r>
+            <a:br>
+              <a:rPr lang="en-US" altLang="ja-JP" dirty="0"/>
+            </a:br>
+            <a:r>
+              <a:rPr lang="ja-JP" altLang="en-US" dirty="0"/>
+              <a:t>担当箇所　モデル、サウンド、アニメーション以外全て</a:t>
+            </a:r>
+            <a:endParaRPr kumimoji="1" lang="en-US" altLang="ja-JP" dirty="0"/>
           </a:p>
         </p:txBody>
       </p:sp>
@@ -5264,7 +5076,7 @@
 </p:sld>
 </file>
 
-<file path=ppt/slides/slide6.xml><?xml version="1.0" encoding="utf-8"?>
+<file path=ppt/slides/slide4.xml><?xml version="1.0" encoding="utf-8"?>
 <p:sld xmlns:a="http://schemas.openxmlformats.org/drawingml/2006/main" xmlns:r="http://schemas.openxmlformats.org/officeDocument/2006/relationships" xmlns:p="http://schemas.openxmlformats.org/presentationml/2006/main">
   <p:cSld>
     <p:bg>
@@ -5537,7 +5349,7 @@
 </p:sld>
 </file>
 
-<file path=ppt/slides/slide7.xml><?xml version="1.0" encoding="utf-8"?>
+<file path=ppt/slides/slide5.xml><?xml version="1.0" encoding="utf-8"?>
 <p:sld xmlns:a="http://schemas.openxmlformats.org/drawingml/2006/main" xmlns:r="http://schemas.openxmlformats.org/officeDocument/2006/relationships" xmlns:p="http://schemas.openxmlformats.org/presentationml/2006/main">
   <p:cSld>
     <p:spTree>
@@ -5716,7 +5528,7 @@
 </p:sld>
 </file>
 
-<file path=ppt/slides/slide8.xml><?xml version="1.0" encoding="utf-8"?>
+<file path=ppt/slides/slide6.xml><?xml version="1.0" encoding="utf-8"?>
 <p:sld xmlns:a="http://schemas.openxmlformats.org/drawingml/2006/main" xmlns:r="http://schemas.openxmlformats.org/officeDocument/2006/relationships" xmlns:p="http://schemas.openxmlformats.org/presentationml/2006/main">
   <p:cSld>
     <p:spTree>
@@ -6004,7 +5816,7 @@
 </p:sld>
 </file>
 
-<file path=ppt/slides/slide9.xml><?xml version="1.0" encoding="utf-8"?>
+<file path=ppt/slides/slide7.xml><?xml version="1.0" encoding="utf-8"?>
 <p:sld xmlns:a="http://schemas.openxmlformats.org/drawingml/2006/main" xmlns:r="http://schemas.openxmlformats.org/officeDocument/2006/relationships" xmlns:p="http://schemas.openxmlformats.org/presentationml/2006/main">
   <p:cSld>
     <p:spTree>
@@ -6176,6 +5988,434 @@
     <p:extLst>
       <p:ext uri="{BB962C8B-B14F-4D97-AF65-F5344CB8AC3E}">
         <p14:creationId xmlns:p14="http://schemas.microsoft.com/office/powerpoint/2010/main" val="781179589"/>
+      </p:ext>
+    </p:extLst>
+  </p:cSld>
+  <p:clrMapOvr>
+    <a:masterClrMapping/>
+  </p:clrMapOvr>
+</p:sld>
+</file>
+
+<file path=ppt/slides/slide8.xml><?xml version="1.0" encoding="utf-8"?>
+<p:sld xmlns:a="http://schemas.openxmlformats.org/drawingml/2006/main" xmlns:r="http://schemas.openxmlformats.org/officeDocument/2006/relationships" xmlns:p="http://schemas.openxmlformats.org/presentationml/2006/main">
+  <p:cSld>
+    <p:spTree>
+      <p:nvGrpSpPr>
+        <p:cNvPr id="1" name=""/>
+        <p:cNvGrpSpPr/>
+        <p:nvPr/>
+      </p:nvGrpSpPr>
+      <p:grpSpPr>
+        <a:xfrm>
+          <a:off x="0" y="0"/>
+          <a:ext cx="0" cy="0"/>
+          <a:chOff x="0" y="0"/>
+          <a:chExt cx="0" cy="0"/>
+        </a:xfrm>
+      </p:grpSpPr>
+      <p:sp>
+        <p:nvSpPr>
+          <p:cNvPr id="2" name="タイトル 1">
+            <a:extLst>
+              <a:ext uri="{FF2B5EF4-FFF2-40B4-BE49-F238E27FC236}">
+                <a16:creationId xmlns:a16="http://schemas.microsoft.com/office/drawing/2014/main" id="{C543B4AE-CDF1-475B-A0C7-C4282CF03024}"/>
+              </a:ext>
+            </a:extLst>
+          </p:cNvPr>
+          <p:cNvSpPr>
+            <a:spLocks noGrp="1"/>
+          </p:cNvSpPr>
+          <p:nvPr>
+            <p:ph type="title"/>
+          </p:nvPr>
+        </p:nvSpPr>
+        <p:spPr>
+          <a:xfrm>
+            <a:off x="704528" y="1700808"/>
+            <a:ext cx="8915400" cy="1138138"/>
+          </a:xfrm>
+        </p:spPr>
+        <p:txBody>
+          <a:bodyPr>
+            <a:normAutofit/>
+          </a:bodyPr>
+          <a:lstStyle/>
+          <a:p>
+            <a:r>
+              <a:rPr lang="ja-JP" altLang="en-US" sz="2000" dirty="0"/>
+              <a:t>コントローラーのインスタンスを作りシーンが遷移されてもそのコントローラーに割り当てたインプットシステムを持ってきている。</a:t>
+            </a:r>
+            <a:endParaRPr kumimoji="1" lang="ja-JP" altLang="en-US" sz="2000" dirty="0"/>
+          </a:p>
+        </p:txBody>
+      </p:sp>
+      <p:pic>
+        <p:nvPicPr>
+          <p:cNvPr id="5" name="コンテンツ プレースホルダー 4">
+            <a:extLst>
+              <a:ext uri="{FF2B5EF4-FFF2-40B4-BE49-F238E27FC236}">
+                <a16:creationId xmlns:a16="http://schemas.microsoft.com/office/drawing/2014/main" id="{A8050D1F-85C2-4C53-9257-7EED9E913437}"/>
+              </a:ext>
+            </a:extLst>
+          </p:cNvPr>
+          <p:cNvPicPr>
+            <a:picLocks noGrp="1" noChangeAspect="1"/>
+          </p:cNvPicPr>
+          <p:nvPr>
+            <p:ph idx="1"/>
+          </p:nvPr>
+        </p:nvPicPr>
+        <p:blipFill>
+          <a:blip r:embed="rId2">
+            <a:extLst>
+              <a:ext uri="{28A0092B-C50C-407E-A947-70E740481C1C}">
+                <a14:useLocalDpi xmlns:a14="http://schemas.microsoft.com/office/drawing/2010/main" val="0"/>
+              </a:ext>
+            </a:extLst>
+          </a:blip>
+          <a:stretch>
+            <a:fillRect/>
+          </a:stretch>
+        </p:blipFill>
+        <p:spPr>
+          <a:xfrm>
+            <a:off x="2072680" y="3573016"/>
+            <a:ext cx="5877745" cy="2581635"/>
+          </a:xfrm>
+        </p:spPr>
+      </p:pic>
+      <p:sp>
+        <p:nvSpPr>
+          <p:cNvPr id="4" name="テキスト ボックス 3">
+            <a:extLst>
+              <a:ext uri="{FF2B5EF4-FFF2-40B4-BE49-F238E27FC236}">
+                <a16:creationId xmlns:a16="http://schemas.microsoft.com/office/drawing/2014/main" id="{89E7C050-CFCF-4342-A9C4-C08F7C277C68}"/>
+              </a:ext>
+            </a:extLst>
+          </p:cNvPr>
+          <p:cNvSpPr txBox="1"/>
+          <p:nvPr/>
+        </p:nvSpPr>
+        <p:spPr>
+          <a:xfrm>
+            <a:off x="416496" y="298827"/>
+            <a:ext cx="3005951" cy="769441"/>
+          </a:xfrm>
+          <a:prstGeom prst="rect">
+            <a:avLst/>
+          </a:prstGeom>
+          <a:noFill/>
+        </p:spPr>
+        <p:txBody>
+          <a:bodyPr wrap="none" rtlCol="0">
+            <a:spAutoFit/>
+          </a:bodyPr>
+          <a:lstStyle/>
+          <a:p>
+            <a:r>
+              <a:rPr kumimoji="1" lang="ja-JP" altLang="en-US" sz="4400" b="1" dirty="0"/>
+              <a:t>技術紹介③</a:t>
+            </a:r>
+          </a:p>
+        </p:txBody>
+      </p:sp>
+    </p:spTree>
+    <p:extLst>
+      <p:ext uri="{BB962C8B-B14F-4D97-AF65-F5344CB8AC3E}">
+        <p14:creationId xmlns:p14="http://schemas.microsoft.com/office/powerpoint/2010/main" val="4218240706"/>
+      </p:ext>
+    </p:extLst>
+  </p:cSld>
+  <p:clrMapOvr>
+    <a:masterClrMapping/>
+  </p:clrMapOvr>
+</p:sld>
+</file>
+
+<file path=ppt/slides/slide9.xml><?xml version="1.0" encoding="utf-8"?>
+<p:sld xmlns:a="http://schemas.openxmlformats.org/drawingml/2006/main" xmlns:r="http://schemas.openxmlformats.org/officeDocument/2006/relationships" xmlns:p="http://schemas.openxmlformats.org/presentationml/2006/main">
+  <p:cSld>
+    <p:spTree>
+      <p:nvGrpSpPr>
+        <p:cNvPr id="1" name=""/>
+        <p:cNvGrpSpPr/>
+        <p:nvPr/>
+      </p:nvGrpSpPr>
+      <p:grpSpPr>
+        <a:xfrm>
+          <a:off x="0" y="0"/>
+          <a:ext cx="0" cy="0"/>
+          <a:chOff x="0" y="0"/>
+          <a:chExt cx="0" cy="0"/>
+        </a:xfrm>
+      </p:grpSpPr>
+      <p:sp>
+        <p:nvSpPr>
+          <p:cNvPr id="2" name="タイトル 1">
+            <a:extLst>
+              <a:ext uri="{FF2B5EF4-FFF2-40B4-BE49-F238E27FC236}">
+                <a16:creationId xmlns:a16="http://schemas.microsoft.com/office/drawing/2014/main" id="{224A73DE-33EE-4915-8BC1-BEADD356235B}"/>
+              </a:ext>
+            </a:extLst>
+          </p:cNvPr>
+          <p:cNvSpPr>
+            <a:spLocks noGrp="1"/>
+          </p:cNvSpPr>
+          <p:nvPr>
+            <p:ph type="title"/>
+          </p:nvPr>
+        </p:nvSpPr>
+        <p:spPr/>
+        <p:txBody>
+          <a:bodyPr/>
+          <a:lstStyle/>
+          <a:p>
+            <a:pPr algn="l"/>
+            <a:r>
+              <a:rPr lang="ja-JP" altLang="en-US" dirty="0"/>
+              <a:t>制作作品</a:t>
+            </a:r>
+            <a:r>
+              <a:rPr lang="en-US" altLang="ja-JP" dirty="0"/>
+              <a:t>   </a:t>
+            </a:r>
+            <a:endParaRPr kumimoji="1" lang="ja-JP" altLang="en-US" dirty="0"/>
+          </a:p>
+        </p:txBody>
+      </p:sp>
+      <p:sp>
+        <p:nvSpPr>
+          <p:cNvPr id="3" name="コンテンツ プレースホルダー 2">
+            <a:extLst>
+              <a:ext uri="{FF2B5EF4-FFF2-40B4-BE49-F238E27FC236}">
+                <a16:creationId xmlns:a16="http://schemas.microsoft.com/office/drawing/2014/main" id="{2BA5DA61-0B78-4574-85D0-7FB4DDAEEC15}"/>
+              </a:ext>
+            </a:extLst>
+          </p:cNvPr>
+          <p:cNvSpPr>
+            <a:spLocks noGrp="1"/>
+          </p:cNvSpPr>
+          <p:nvPr>
+            <p:ph idx="1"/>
+          </p:nvPr>
+        </p:nvSpPr>
+        <p:spPr>
+          <a:xfrm>
+            <a:off x="20171" y="1628800"/>
+            <a:ext cx="8915400" cy="4525963"/>
+          </a:xfrm>
+        </p:spPr>
+        <p:txBody>
+          <a:bodyPr/>
+          <a:lstStyle/>
+          <a:p>
+            <a:r>
+              <a:rPr lang="en-US" altLang="ja-JP" dirty="0">
+                <a:solidFill>
+                  <a:schemeClr val="bg1"/>
+                </a:solidFill>
+              </a:rPr>
+              <a:t>Cockroach</a:t>
+            </a:r>
+          </a:p>
+          <a:p>
+            <a:r>
+              <a:rPr lang="ja-JP" altLang="en-US" dirty="0">
+                <a:solidFill>
+                  <a:schemeClr val="bg1"/>
+                </a:solidFill>
+              </a:rPr>
+              <a:t>言語　</a:t>
+            </a:r>
+            <a:r>
+              <a:rPr lang="en-US" altLang="ja-JP" dirty="0">
+                <a:solidFill>
+                  <a:schemeClr val="bg1"/>
+                </a:solidFill>
+              </a:rPr>
+              <a:t>C++</a:t>
+            </a:r>
+          </a:p>
+          <a:p>
+            <a:r>
+              <a:rPr lang="ja-JP" altLang="en-US" dirty="0">
+                <a:solidFill>
+                  <a:schemeClr val="bg1"/>
+                </a:solidFill>
+              </a:rPr>
+              <a:t>本格的なゲーム作成として行った最初の製作作品です。</a:t>
+            </a:r>
+            <a:endParaRPr lang="en-US" altLang="ja-JP" dirty="0">
+              <a:solidFill>
+                <a:schemeClr val="bg1"/>
+              </a:solidFill>
+            </a:endParaRPr>
+          </a:p>
+        </p:txBody>
+      </p:sp>
+      <p:pic>
+        <p:nvPicPr>
+          <p:cNvPr id="5" name="図 4">
+            <a:extLst>
+              <a:ext uri="{FF2B5EF4-FFF2-40B4-BE49-F238E27FC236}">
+                <a16:creationId xmlns:a16="http://schemas.microsoft.com/office/drawing/2014/main" id="{6F9195E3-4D03-40EF-8354-F294B66092FB}"/>
+              </a:ext>
+            </a:extLst>
+          </p:cNvPr>
+          <p:cNvPicPr>
+            <a:picLocks noChangeAspect="1"/>
+          </p:cNvPicPr>
+          <p:nvPr/>
+        </p:nvPicPr>
+        <p:blipFill>
+          <a:blip r:embed="rId2">
+            <a:extLst>
+              <a:ext uri="{28A0092B-C50C-407E-A947-70E740481C1C}">
+                <a14:useLocalDpi xmlns:a14="http://schemas.microsoft.com/office/drawing/2010/main" val="0"/>
+              </a:ext>
+            </a:extLst>
+          </a:blip>
+          <a:stretch>
+            <a:fillRect/>
+          </a:stretch>
+        </p:blipFill>
+        <p:spPr>
+          <a:xfrm>
+            <a:off x="4468371" y="3429000"/>
+            <a:ext cx="4464496" cy="3000342"/>
+          </a:xfrm>
+          <a:prstGeom prst="rect">
+            <a:avLst/>
+          </a:prstGeom>
+        </p:spPr>
+      </p:pic>
+      <p:sp>
+        <p:nvSpPr>
+          <p:cNvPr id="6" name="テキスト ボックス 5">
+            <a:extLst>
+              <a:ext uri="{FF2B5EF4-FFF2-40B4-BE49-F238E27FC236}">
+                <a16:creationId xmlns:a16="http://schemas.microsoft.com/office/drawing/2014/main" id="{915E3D31-1BB1-4C31-9360-C30F695ADEF3}"/>
+              </a:ext>
+            </a:extLst>
+          </p:cNvPr>
+          <p:cNvSpPr txBox="1"/>
+          <p:nvPr/>
+        </p:nvSpPr>
+        <p:spPr>
+          <a:xfrm>
+            <a:off x="272480" y="3846439"/>
+            <a:ext cx="4032448" cy="2308324"/>
+          </a:xfrm>
+          <a:prstGeom prst="rect">
+            <a:avLst/>
+          </a:prstGeom>
+          <a:noFill/>
+        </p:spPr>
+        <p:txBody>
+          <a:bodyPr wrap="square" rtlCol="0">
+            <a:spAutoFit/>
+          </a:bodyPr>
+          <a:lstStyle/>
+          <a:p>
+            <a:r>
+              <a:rPr kumimoji="1" lang="ja-JP" altLang="en-US" dirty="0"/>
+              <a:t>ジャンル　アクションゲーム</a:t>
+            </a:r>
+            <a:endParaRPr kumimoji="1" lang="en-US" altLang="ja-JP" dirty="0"/>
+          </a:p>
+          <a:p>
+            <a:r>
+              <a:rPr kumimoji="1" lang="ja-JP" altLang="en-US" dirty="0"/>
+              <a:t>開発環境　</a:t>
+            </a:r>
+            <a:r>
+              <a:rPr lang="en-US" altLang="ja-JP" dirty="0"/>
+              <a:t>Dx</a:t>
+            </a:r>
+            <a:r>
+              <a:rPr lang="ja-JP" altLang="en-US" dirty="0"/>
+              <a:t>ライブラリ</a:t>
+            </a:r>
+            <a:r>
+              <a:rPr lang="en-US" altLang="ja-JP" dirty="0"/>
+              <a:t>/C++</a:t>
+            </a:r>
+            <a:br>
+              <a:rPr lang="en-US" altLang="ja-JP" dirty="0"/>
+            </a:br>
+            <a:r>
+              <a:rPr lang="ja-JP" altLang="en-US" dirty="0"/>
+              <a:t>対応機種　</a:t>
+            </a:r>
+            <a:r>
+              <a:rPr lang="en-US" altLang="ja-JP" dirty="0"/>
+              <a:t>PC</a:t>
+            </a:r>
+            <a:br>
+              <a:rPr lang="en-US" altLang="ja-JP" dirty="0"/>
+            </a:br>
+            <a:r>
+              <a:rPr lang="ja-JP" altLang="en-US" dirty="0"/>
+              <a:t>制作期間　</a:t>
+            </a:r>
+            <a:r>
+              <a:rPr lang="en-US" altLang="ja-JP" dirty="0"/>
+              <a:t>3</a:t>
+            </a:r>
+            <a:r>
+              <a:rPr lang="ja-JP" altLang="en-US" dirty="0"/>
+              <a:t>カ月</a:t>
+            </a:r>
+            <a:br>
+              <a:rPr lang="en-US" altLang="ja-JP" dirty="0"/>
+            </a:br>
+            <a:r>
+              <a:rPr lang="ja-JP" altLang="en-US" dirty="0"/>
+              <a:t>制作時期　</a:t>
+            </a:r>
+            <a:r>
+              <a:rPr lang="en-US" altLang="ja-JP" dirty="0"/>
+              <a:t>2023</a:t>
+            </a:r>
+            <a:r>
+              <a:rPr lang="ja-JP" altLang="en-US" dirty="0"/>
+              <a:t>年</a:t>
+            </a:r>
+            <a:r>
+              <a:rPr lang="en-US" altLang="ja-JP" dirty="0"/>
+              <a:t>12</a:t>
+            </a:r>
+            <a:r>
+              <a:rPr lang="ja-JP" altLang="en-US" dirty="0"/>
+              <a:t>月</a:t>
+            </a:r>
+            <a:r>
+              <a:rPr lang="en-US" altLang="ja-JP" dirty="0"/>
+              <a:t>~</a:t>
+            </a:r>
+            <a:br>
+              <a:rPr lang="en-US" altLang="ja-JP" dirty="0"/>
+            </a:br>
+            <a:r>
+              <a:rPr lang="ja-JP" altLang="en-US" dirty="0"/>
+              <a:t>制作人数　一人</a:t>
+            </a:r>
+            <a:br>
+              <a:rPr lang="en-US" altLang="ja-JP" dirty="0"/>
+            </a:br>
+            <a:r>
+              <a:rPr lang="ja-JP" altLang="en-US" dirty="0"/>
+              <a:t>担当箇所　モデル、サウンド以外全て</a:t>
+            </a:r>
+            <a:endParaRPr kumimoji="1" lang="en-US" altLang="ja-JP" dirty="0"/>
+          </a:p>
+        </p:txBody>
+      </p:sp>
+    </p:spTree>
+    <p:extLst>
+      <p:ext uri="{BB962C8B-B14F-4D97-AF65-F5344CB8AC3E}">
+        <p14:creationId xmlns:p14="http://schemas.microsoft.com/office/powerpoint/2010/main" val="3439998654"/>
       </p:ext>
     </p:extLst>
   </p:cSld>
